--- a/组会记录/组会1106.pptx
+++ b/组会记录/组会1106.pptx
@@ -5,29 +5,33 @@
     <p:sldMasterId id="2147483648" r:id="rId1"/>
   </p:sldMasterIdLst>
   <p:notesMasterIdLst>
-    <p:notesMasterId r:id="rId17"/>
+    <p:notesMasterId r:id="rId22"/>
   </p:notesMasterIdLst>
   <p:sldIdLst>
-    <p:sldId id="257" r:id="rId2"/>
-    <p:sldId id="327" r:id="rId3"/>
-    <p:sldId id="265" r:id="rId4"/>
-    <p:sldId id="277" r:id="rId5"/>
-    <p:sldId id="315" r:id="rId6"/>
-    <p:sldId id="328" r:id="rId7"/>
-    <p:sldId id="329" r:id="rId8"/>
-    <p:sldId id="330" r:id="rId9"/>
-    <p:sldId id="331" r:id="rId10"/>
-    <p:sldId id="332" r:id="rId11"/>
-    <p:sldId id="333" r:id="rId12"/>
-    <p:sldId id="334" r:id="rId13"/>
-    <p:sldId id="335" r:id="rId14"/>
-    <p:sldId id="336" r:id="rId15"/>
-    <p:sldId id="337" r:id="rId16"/>
+    <p:sldId id="257" r:id="rId3"/>
+    <p:sldId id="327" r:id="rId4"/>
+    <p:sldId id="265" r:id="rId5"/>
+    <p:sldId id="277" r:id="rId6"/>
+    <p:sldId id="315" r:id="rId7"/>
+    <p:sldId id="328" r:id="rId8"/>
+    <p:sldId id="329" r:id="rId9"/>
+    <p:sldId id="330" r:id="rId10"/>
+    <p:sldId id="331" r:id="rId11"/>
+    <p:sldId id="332" r:id="rId12"/>
+    <p:sldId id="333" r:id="rId13"/>
+    <p:sldId id="334" r:id="rId14"/>
+    <p:sldId id="335" r:id="rId15"/>
+    <p:sldId id="336" r:id="rId16"/>
+    <p:sldId id="337" r:id="rId17"/>
+    <p:sldId id="342" r:id="rId18"/>
+    <p:sldId id="341" r:id="rId19"/>
+    <p:sldId id="343" r:id="rId20"/>
+    <p:sldId id="344" r:id="rId21"/>
   </p:sldIdLst>
   <p:sldSz cx="12192000" cy="6858000"/>
   <p:notesSz cx="6858000" cy="9144000"/>
   <p:custDataLst>
-    <p:tags r:id="rId18"/>
+    <p:tags r:id="rId26"/>
   </p:custDataLst>
   <p:defaultTextStyle>
     <a:defPPr>
@@ -124,11 +128,6 @@
       </a:defRPr>
     </a:lvl9pPr>
   </p:defaultTextStyle>
-  <p:extLst>
-    <p:ext uri="{EFAFB233-063F-42B5-8137-9DF3F51BA10A}">
-      <p15:sldGuideLst xmlns:p15="http://schemas.microsoft.com/office/powerpoint/2012/main"/>
-    </p:ext>
-  </p:extLst>
 </p:presentation>
 </file>
 
@@ -214,7 +213,6 @@
           <a:p>
             <a:fld id="{D2A48B96-639E-45A3-A0BA-2464DFDB1FAA}" type="datetimeFigureOut">
               <a:rPr lang="zh-CN" altLang="en-US" smtClean="0"/>
-              <a:t>2025/11/6</a:t>
             </a:fld>
             <a:endParaRPr lang="zh-CN" altLang="en-US"/>
           </a:p>
@@ -281,6 +279,7 @@
               <a:rPr lang="zh-CN" altLang="en-US"/>
               <a:t>单击此处编辑母版文本样式</a:t>
             </a:r>
+            <a:endParaRPr lang="zh-CN" altLang="en-US"/>
           </a:p>
           <a:p>
             <a:pPr lvl="1"/>
@@ -288,6 +287,7 @@
               <a:rPr lang="zh-CN" altLang="en-US"/>
               <a:t>第二级</a:t>
             </a:r>
+            <a:endParaRPr lang="zh-CN" altLang="en-US"/>
           </a:p>
           <a:p>
             <a:pPr lvl="2"/>
@@ -295,6 +295,7 @@
               <a:rPr lang="zh-CN" altLang="en-US"/>
               <a:t>第三级</a:t>
             </a:r>
+            <a:endParaRPr lang="zh-CN" altLang="en-US"/>
           </a:p>
           <a:p>
             <a:pPr lvl="3"/>
@@ -302,6 +303,7 @@
               <a:rPr lang="zh-CN" altLang="en-US"/>
               <a:t>第四级</a:t>
             </a:r>
+            <a:endParaRPr lang="zh-CN" altLang="en-US"/>
           </a:p>
           <a:p>
             <a:pPr lvl="4"/>
@@ -309,6 +311,7 @@
               <a:rPr lang="zh-CN" altLang="en-US"/>
               <a:t>第五级</a:t>
             </a:r>
+            <a:endParaRPr lang="zh-CN" altLang="en-US"/>
           </a:p>
         </p:txBody>
       </p:sp>
@@ -372,7 +375,6 @@
           <a:p>
             <a:fld id="{A6837353-30EB-4A48-80EB-173D804AEFBD}" type="slidenum">
               <a:rPr lang="zh-CN" altLang="en-US" smtClean="0"/>
-              <a:t>‹#›</a:t>
             </a:fld>
             <a:endParaRPr lang="zh-CN" altLang="en-US"/>
           </a:p>
@@ -521,6 +523,7 @@
               <a:rPr lang="zh-CN" altLang="en-US"/>
               <a:t>单击此处编辑母版标题样式</a:t>
             </a:r>
+            <a:endParaRPr lang="zh-CN" altLang="en-US"/>
           </a:p>
         </p:txBody>
       </p:sp>
@@ -585,6 +588,7 @@
               <a:rPr lang="zh-CN" altLang="en-US"/>
               <a:t>单击此处编辑母版副标题样式</a:t>
             </a:r>
+            <a:endParaRPr lang="zh-CN" altLang="en-US"/>
           </a:p>
         </p:txBody>
       </p:sp>
@@ -605,7 +609,6 @@
           <a:p>
             <a:fld id="{837840E2-13A5-46A9-A265-C77FF1EECC77}" type="datetimeFigureOut">
               <a:rPr lang="zh-CN" altLang="en-US" smtClean="0"/>
-              <a:t>2025/11/6</a:t>
             </a:fld>
             <a:endParaRPr lang="zh-CN" altLang="en-US"/>
           </a:p>
@@ -647,7 +650,6 @@
           <a:p>
             <a:fld id="{079686F9-7E47-4853-B8F4-FBCF71CB48DC}" type="slidenum">
               <a:rPr lang="zh-CN" altLang="en-US" smtClean="0"/>
-              <a:t>‹#›</a:t>
             </a:fld>
             <a:endParaRPr lang="zh-CN" altLang="en-US"/>
           </a:p>
@@ -697,6 +699,7 @@
               <a:rPr lang="zh-CN" altLang="en-US"/>
               <a:t>单击此处编辑母版标题样式</a:t>
             </a:r>
+            <a:endParaRPr lang="zh-CN" altLang="en-US"/>
           </a:p>
         </p:txBody>
       </p:sp>
@@ -720,6 +723,7 @@
               <a:rPr lang="zh-CN" altLang="en-US"/>
               <a:t>单击此处编辑母版文本样式</a:t>
             </a:r>
+            <a:endParaRPr lang="zh-CN" altLang="en-US"/>
           </a:p>
           <a:p>
             <a:pPr lvl="1"/>
@@ -727,6 +731,7 @@
               <a:rPr lang="zh-CN" altLang="en-US"/>
               <a:t>二级</a:t>
             </a:r>
+            <a:endParaRPr lang="zh-CN" altLang="en-US"/>
           </a:p>
           <a:p>
             <a:pPr lvl="2"/>
@@ -734,6 +739,7 @@
               <a:rPr lang="zh-CN" altLang="en-US"/>
               <a:t>三级</a:t>
             </a:r>
+            <a:endParaRPr lang="zh-CN" altLang="en-US"/>
           </a:p>
           <a:p>
             <a:pPr lvl="3"/>
@@ -741,6 +747,7 @@
               <a:rPr lang="zh-CN" altLang="en-US"/>
               <a:t>四级</a:t>
             </a:r>
+            <a:endParaRPr lang="zh-CN" altLang="en-US"/>
           </a:p>
           <a:p>
             <a:pPr lvl="4"/>
@@ -748,6 +755,7 @@
               <a:rPr lang="zh-CN" altLang="en-US"/>
               <a:t>五级</a:t>
             </a:r>
+            <a:endParaRPr lang="zh-CN" altLang="en-US"/>
           </a:p>
         </p:txBody>
       </p:sp>
@@ -768,7 +776,6 @@
           <a:p>
             <a:fld id="{837840E2-13A5-46A9-A265-C77FF1EECC77}" type="datetimeFigureOut">
               <a:rPr lang="zh-CN" altLang="en-US" smtClean="0"/>
-              <a:t>2025/11/6</a:t>
             </a:fld>
             <a:endParaRPr lang="zh-CN" altLang="en-US"/>
           </a:p>
@@ -810,7 +817,6 @@
           <a:p>
             <a:fld id="{079686F9-7E47-4853-B8F4-FBCF71CB48DC}" type="slidenum">
               <a:rPr lang="zh-CN" altLang="en-US" smtClean="0"/>
-              <a:t>‹#›</a:t>
             </a:fld>
             <a:endParaRPr lang="zh-CN" altLang="en-US"/>
           </a:p>
@@ -865,6 +871,7 @@
               <a:rPr lang="zh-CN" altLang="en-US"/>
               <a:t>单击此处编辑母版标题样式</a:t>
             </a:r>
+            <a:endParaRPr lang="zh-CN" altLang="en-US"/>
           </a:p>
         </p:txBody>
       </p:sp>
@@ -893,6 +900,7 @@
               <a:rPr lang="zh-CN" altLang="en-US"/>
               <a:t>单击此处编辑母版文本样式</a:t>
             </a:r>
+            <a:endParaRPr lang="zh-CN" altLang="en-US"/>
           </a:p>
           <a:p>
             <a:pPr lvl="1"/>
@@ -900,6 +908,7 @@
               <a:rPr lang="zh-CN" altLang="en-US"/>
               <a:t>二级</a:t>
             </a:r>
+            <a:endParaRPr lang="zh-CN" altLang="en-US"/>
           </a:p>
           <a:p>
             <a:pPr lvl="2"/>
@@ -907,6 +916,7 @@
               <a:rPr lang="zh-CN" altLang="en-US"/>
               <a:t>三级</a:t>
             </a:r>
+            <a:endParaRPr lang="zh-CN" altLang="en-US"/>
           </a:p>
           <a:p>
             <a:pPr lvl="3"/>
@@ -914,6 +924,7 @@
               <a:rPr lang="zh-CN" altLang="en-US"/>
               <a:t>四级</a:t>
             </a:r>
+            <a:endParaRPr lang="zh-CN" altLang="en-US"/>
           </a:p>
           <a:p>
             <a:pPr lvl="4"/>
@@ -921,6 +932,7 @@
               <a:rPr lang="zh-CN" altLang="en-US"/>
               <a:t>五级</a:t>
             </a:r>
+            <a:endParaRPr lang="zh-CN" altLang="en-US"/>
           </a:p>
         </p:txBody>
       </p:sp>
@@ -941,7 +953,6 @@
           <a:p>
             <a:fld id="{837840E2-13A5-46A9-A265-C77FF1EECC77}" type="datetimeFigureOut">
               <a:rPr lang="zh-CN" altLang="en-US" smtClean="0"/>
-              <a:t>2025/11/6</a:t>
             </a:fld>
             <a:endParaRPr lang="zh-CN" altLang="en-US"/>
           </a:p>
@@ -983,7 +994,6 @@
           <a:p>
             <a:fld id="{079686F9-7E47-4853-B8F4-FBCF71CB48DC}" type="slidenum">
               <a:rPr lang="zh-CN" altLang="en-US" smtClean="0"/>
-              <a:t>‹#›</a:t>
             </a:fld>
             <a:endParaRPr lang="zh-CN" altLang="en-US"/>
           </a:p>
@@ -1033,6 +1043,7 @@
               <a:rPr lang="zh-CN" altLang="en-US"/>
               <a:t>单击此处编辑母版标题样式</a:t>
             </a:r>
+            <a:endParaRPr lang="zh-CN" altLang="en-US"/>
           </a:p>
         </p:txBody>
       </p:sp>
@@ -1056,6 +1067,7 @@
               <a:rPr lang="zh-CN" altLang="en-US"/>
               <a:t>单击此处编辑母版文本样式</a:t>
             </a:r>
+            <a:endParaRPr lang="zh-CN" altLang="en-US"/>
           </a:p>
           <a:p>
             <a:pPr lvl="1"/>
@@ -1063,6 +1075,7 @@
               <a:rPr lang="zh-CN" altLang="en-US"/>
               <a:t>二级</a:t>
             </a:r>
+            <a:endParaRPr lang="zh-CN" altLang="en-US"/>
           </a:p>
           <a:p>
             <a:pPr lvl="2"/>
@@ -1070,6 +1083,7 @@
               <a:rPr lang="zh-CN" altLang="en-US"/>
               <a:t>三级</a:t>
             </a:r>
+            <a:endParaRPr lang="zh-CN" altLang="en-US"/>
           </a:p>
           <a:p>
             <a:pPr lvl="3"/>
@@ -1077,6 +1091,7 @@
               <a:rPr lang="zh-CN" altLang="en-US"/>
               <a:t>四级</a:t>
             </a:r>
+            <a:endParaRPr lang="zh-CN" altLang="en-US"/>
           </a:p>
           <a:p>
             <a:pPr lvl="4"/>
@@ -1084,6 +1099,7 @@
               <a:rPr lang="zh-CN" altLang="en-US"/>
               <a:t>五级</a:t>
             </a:r>
+            <a:endParaRPr lang="zh-CN" altLang="en-US"/>
           </a:p>
         </p:txBody>
       </p:sp>
@@ -1104,7 +1120,6 @@
           <a:p>
             <a:fld id="{837840E2-13A5-46A9-A265-C77FF1EECC77}" type="datetimeFigureOut">
               <a:rPr lang="zh-CN" altLang="en-US" smtClean="0"/>
-              <a:t>2025/11/6</a:t>
             </a:fld>
             <a:endParaRPr lang="zh-CN" altLang="en-US"/>
           </a:p>
@@ -1146,7 +1161,6 @@
           <a:p>
             <a:fld id="{079686F9-7E47-4853-B8F4-FBCF71CB48DC}" type="slidenum">
               <a:rPr lang="zh-CN" altLang="en-US" smtClean="0"/>
-              <a:t>‹#›</a:t>
             </a:fld>
             <a:endParaRPr lang="zh-CN" altLang="en-US"/>
           </a:p>
@@ -1205,6 +1219,7 @@
               <a:rPr lang="zh-CN" altLang="en-US"/>
               <a:t>单击此处编辑母版标题样式</a:t>
             </a:r>
+            <a:endParaRPr lang="zh-CN" altLang="en-US"/>
           </a:p>
         </p:txBody>
       </p:sp>
@@ -1324,6 +1339,7 @@
               <a:rPr lang="zh-CN" altLang="en-US"/>
               <a:t>单击此处编辑母版文本样式</a:t>
             </a:r>
+            <a:endParaRPr lang="zh-CN" altLang="en-US"/>
           </a:p>
         </p:txBody>
       </p:sp>
@@ -1344,7 +1360,6 @@
           <a:p>
             <a:fld id="{837840E2-13A5-46A9-A265-C77FF1EECC77}" type="datetimeFigureOut">
               <a:rPr lang="zh-CN" altLang="en-US" smtClean="0"/>
-              <a:t>2025/11/6</a:t>
             </a:fld>
             <a:endParaRPr lang="zh-CN" altLang="en-US"/>
           </a:p>
@@ -1386,7 +1401,6 @@
           <a:p>
             <a:fld id="{079686F9-7E47-4853-B8F4-FBCF71CB48DC}" type="slidenum">
               <a:rPr lang="zh-CN" altLang="en-US" smtClean="0"/>
-              <a:t>‹#›</a:t>
             </a:fld>
             <a:endParaRPr lang="zh-CN" altLang="en-US"/>
           </a:p>
@@ -1436,6 +1450,7 @@
               <a:rPr lang="zh-CN" altLang="en-US"/>
               <a:t>单击此处编辑母版标题样式</a:t>
             </a:r>
+            <a:endParaRPr lang="zh-CN" altLang="en-US"/>
           </a:p>
         </p:txBody>
       </p:sp>
@@ -1464,6 +1479,7 @@
               <a:rPr lang="zh-CN" altLang="en-US"/>
               <a:t>单击此处编辑母版文本样式</a:t>
             </a:r>
+            <a:endParaRPr lang="zh-CN" altLang="en-US"/>
           </a:p>
           <a:p>
             <a:pPr lvl="1"/>
@@ -1471,6 +1487,7 @@
               <a:rPr lang="zh-CN" altLang="en-US"/>
               <a:t>二级</a:t>
             </a:r>
+            <a:endParaRPr lang="zh-CN" altLang="en-US"/>
           </a:p>
           <a:p>
             <a:pPr lvl="2"/>
@@ -1478,6 +1495,7 @@
               <a:rPr lang="zh-CN" altLang="en-US"/>
               <a:t>三级</a:t>
             </a:r>
+            <a:endParaRPr lang="zh-CN" altLang="en-US"/>
           </a:p>
           <a:p>
             <a:pPr lvl="3"/>
@@ -1485,6 +1503,7 @@
               <a:rPr lang="zh-CN" altLang="en-US"/>
               <a:t>四级</a:t>
             </a:r>
+            <a:endParaRPr lang="zh-CN" altLang="en-US"/>
           </a:p>
           <a:p>
             <a:pPr lvl="4"/>
@@ -1492,6 +1511,7 @@
               <a:rPr lang="zh-CN" altLang="en-US"/>
               <a:t>五级</a:t>
             </a:r>
+            <a:endParaRPr lang="zh-CN" altLang="en-US"/>
           </a:p>
         </p:txBody>
       </p:sp>
@@ -1520,6 +1540,7 @@
               <a:rPr lang="zh-CN" altLang="en-US"/>
               <a:t>单击此处编辑母版文本样式</a:t>
             </a:r>
+            <a:endParaRPr lang="zh-CN" altLang="en-US"/>
           </a:p>
           <a:p>
             <a:pPr lvl="1"/>
@@ -1527,6 +1548,7 @@
               <a:rPr lang="zh-CN" altLang="en-US"/>
               <a:t>二级</a:t>
             </a:r>
+            <a:endParaRPr lang="zh-CN" altLang="en-US"/>
           </a:p>
           <a:p>
             <a:pPr lvl="2"/>
@@ -1534,6 +1556,7 @@
               <a:rPr lang="zh-CN" altLang="en-US"/>
               <a:t>三级</a:t>
             </a:r>
+            <a:endParaRPr lang="zh-CN" altLang="en-US"/>
           </a:p>
           <a:p>
             <a:pPr lvl="3"/>
@@ -1541,6 +1564,7 @@
               <a:rPr lang="zh-CN" altLang="en-US"/>
               <a:t>四级</a:t>
             </a:r>
+            <a:endParaRPr lang="zh-CN" altLang="en-US"/>
           </a:p>
           <a:p>
             <a:pPr lvl="4"/>
@@ -1548,6 +1572,7 @@
               <a:rPr lang="zh-CN" altLang="en-US"/>
               <a:t>五级</a:t>
             </a:r>
+            <a:endParaRPr lang="zh-CN" altLang="en-US"/>
           </a:p>
         </p:txBody>
       </p:sp>
@@ -1568,7 +1593,6 @@
           <a:p>
             <a:fld id="{837840E2-13A5-46A9-A265-C77FF1EECC77}" type="datetimeFigureOut">
               <a:rPr lang="zh-CN" altLang="en-US" smtClean="0"/>
-              <a:t>2025/11/6</a:t>
             </a:fld>
             <a:endParaRPr lang="zh-CN" altLang="en-US"/>
           </a:p>
@@ -1610,7 +1634,6 @@
           <a:p>
             <a:fld id="{079686F9-7E47-4853-B8F4-FBCF71CB48DC}" type="slidenum">
               <a:rPr lang="zh-CN" altLang="en-US" smtClean="0"/>
-              <a:t>‹#›</a:t>
             </a:fld>
             <a:endParaRPr lang="zh-CN" altLang="en-US"/>
           </a:p>
@@ -1665,6 +1688,7 @@
               <a:rPr lang="zh-CN" altLang="en-US"/>
               <a:t>单击此处编辑母版标题样式</a:t>
             </a:r>
+            <a:endParaRPr lang="zh-CN" altLang="en-US"/>
           </a:p>
         </p:txBody>
       </p:sp>
@@ -1730,6 +1754,7 @@
               <a:rPr lang="zh-CN" altLang="en-US"/>
               <a:t>单击此处编辑母版文本样式</a:t>
             </a:r>
+            <a:endParaRPr lang="zh-CN" altLang="en-US"/>
           </a:p>
         </p:txBody>
       </p:sp>
@@ -1758,6 +1783,7 @@
               <a:rPr lang="zh-CN" altLang="en-US"/>
               <a:t>单击此处编辑母版文本样式</a:t>
             </a:r>
+            <a:endParaRPr lang="zh-CN" altLang="en-US"/>
           </a:p>
           <a:p>
             <a:pPr lvl="1"/>
@@ -1765,6 +1791,7 @@
               <a:rPr lang="zh-CN" altLang="en-US"/>
               <a:t>二级</a:t>
             </a:r>
+            <a:endParaRPr lang="zh-CN" altLang="en-US"/>
           </a:p>
           <a:p>
             <a:pPr lvl="2"/>
@@ -1772,6 +1799,7 @@
               <a:rPr lang="zh-CN" altLang="en-US"/>
               <a:t>三级</a:t>
             </a:r>
+            <a:endParaRPr lang="zh-CN" altLang="en-US"/>
           </a:p>
           <a:p>
             <a:pPr lvl="3"/>
@@ -1779,6 +1807,7 @@
               <a:rPr lang="zh-CN" altLang="en-US"/>
               <a:t>四级</a:t>
             </a:r>
+            <a:endParaRPr lang="zh-CN" altLang="en-US"/>
           </a:p>
           <a:p>
             <a:pPr lvl="4"/>
@@ -1786,6 +1815,7 @@
               <a:rPr lang="zh-CN" altLang="en-US"/>
               <a:t>五级</a:t>
             </a:r>
+            <a:endParaRPr lang="zh-CN" altLang="en-US"/>
           </a:p>
         </p:txBody>
       </p:sp>
@@ -1851,6 +1881,7 @@
               <a:rPr lang="zh-CN" altLang="en-US"/>
               <a:t>单击此处编辑母版文本样式</a:t>
             </a:r>
+            <a:endParaRPr lang="zh-CN" altLang="en-US"/>
           </a:p>
         </p:txBody>
       </p:sp>
@@ -1879,6 +1910,7 @@
               <a:rPr lang="zh-CN" altLang="en-US"/>
               <a:t>单击此处编辑母版文本样式</a:t>
             </a:r>
+            <a:endParaRPr lang="zh-CN" altLang="en-US"/>
           </a:p>
           <a:p>
             <a:pPr lvl="1"/>
@@ -1886,6 +1918,7 @@
               <a:rPr lang="zh-CN" altLang="en-US"/>
               <a:t>二级</a:t>
             </a:r>
+            <a:endParaRPr lang="zh-CN" altLang="en-US"/>
           </a:p>
           <a:p>
             <a:pPr lvl="2"/>
@@ -1893,6 +1926,7 @@
               <a:rPr lang="zh-CN" altLang="en-US"/>
               <a:t>三级</a:t>
             </a:r>
+            <a:endParaRPr lang="zh-CN" altLang="en-US"/>
           </a:p>
           <a:p>
             <a:pPr lvl="3"/>
@@ -1900,6 +1934,7 @@
               <a:rPr lang="zh-CN" altLang="en-US"/>
               <a:t>四级</a:t>
             </a:r>
+            <a:endParaRPr lang="zh-CN" altLang="en-US"/>
           </a:p>
           <a:p>
             <a:pPr lvl="4"/>
@@ -1907,6 +1942,7 @@
               <a:rPr lang="zh-CN" altLang="en-US"/>
               <a:t>五级</a:t>
             </a:r>
+            <a:endParaRPr lang="zh-CN" altLang="en-US"/>
           </a:p>
         </p:txBody>
       </p:sp>
@@ -1927,7 +1963,6 @@
           <a:p>
             <a:fld id="{837840E2-13A5-46A9-A265-C77FF1EECC77}" type="datetimeFigureOut">
               <a:rPr lang="zh-CN" altLang="en-US" smtClean="0"/>
-              <a:t>2025/11/6</a:t>
             </a:fld>
             <a:endParaRPr lang="zh-CN" altLang="en-US"/>
           </a:p>
@@ -1969,7 +2004,6 @@
           <a:p>
             <a:fld id="{079686F9-7E47-4853-B8F4-FBCF71CB48DC}" type="slidenum">
               <a:rPr lang="zh-CN" altLang="en-US" smtClean="0"/>
-              <a:t>‹#›</a:t>
             </a:fld>
             <a:endParaRPr lang="zh-CN" altLang="en-US"/>
           </a:p>
@@ -2019,6 +2053,7 @@
               <a:rPr lang="zh-CN" altLang="en-US"/>
               <a:t>单击此处编辑母版标题样式</a:t>
             </a:r>
+            <a:endParaRPr lang="zh-CN" altLang="en-US"/>
           </a:p>
         </p:txBody>
       </p:sp>
@@ -2039,7 +2074,6 @@
           <a:p>
             <a:fld id="{837840E2-13A5-46A9-A265-C77FF1EECC77}" type="datetimeFigureOut">
               <a:rPr lang="zh-CN" altLang="en-US" smtClean="0"/>
-              <a:t>2025/11/6</a:t>
             </a:fld>
             <a:endParaRPr lang="zh-CN" altLang="en-US"/>
           </a:p>
@@ -2081,7 +2115,6 @@
           <a:p>
             <a:fld id="{079686F9-7E47-4853-B8F4-FBCF71CB48DC}" type="slidenum">
               <a:rPr lang="zh-CN" altLang="en-US" smtClean="0"/>
-              <a:t>‹#›</a:t>
             </a:fld>
             <a:endParaRPr lang="zh-CN" altLang="en-US"/>
           </a:p>
@@ -2129,7 +2162,6 @@
           <a:p>
             <a:fld id="{837840E2-13A5-46A9-A265-C77FF1EECC77}" type="datetimeFigureOut">
               <a:rPr lang="zh-CN" altLang="en-US" smtClean="0"/>
-              <a:t>2025/11/6</a:t>
             </a:fld>
             <a:endParaRPr lang="zh-CN" altLang="en-US"/>
           </a:p>
@@ -2171,7 +2203,6 @@
           <a:p>
             <a:fld id="{079686F9-7E47-4853-B8F4-FBCF71CB48DC}" type="slidenum">
               <a:rPr lang="zh-CN" altLang="en-US" smtClean="0"/>
-              <a:t>‹#›</a:t>
             </a:fld>
             <a:endParaRPr lang="zh-CN" altLang="en-US"/>
           </a:p>
@@ -2230,6 +2261,7 @@
               <a:rPr lang="zh-CN" altLang="en-US"/>
               <a:t>单击此处编辑母版标题样式</a:t>
             </a:r>
+            <a:endParaRPr lang="zh-CN" altLang="en-US"/>
           </a:p>
         </p:txBody>
       </p:sp>
@@ -2286,6 +2318,7 @@
               <a:rPr lang="zh-CN" altLang="en-US"/>
               <a:t>单击此处编辑母版文本样式</a:t>
             </a:r>
+            <a:endParaRPr lang="zh-CN" altLang="en-US"/>
           </a:p>
           <a:p>
             <a:pPr lvl="1"/>
@@ -2293,6 +2326,7 @@
               <a:rPr lang="zh-CN" altLang="en-US"/>
               <a:t>二级</a:t>
             </a:r>
+            <a:endParaRPr lang="zh-CN" altLang="en-US"/>
           </a:p>
           <a:p>
             <a:pPr lvl="2"/>
@@ -2300,6 +2334,7 @@
               <a:rPr lang="zh-CN" altLang="en-US"/>
               <a:t>三级</a:t>
             </a:r>
+            <a:endParaRPr lang="zh-CN" altLang="en-US"/>
           </a:p>
           <a:p>
             <a:pPr lvl="3"/>
@@ -2307,6 +2342,7 @@
               <a:rPr lang="zh-CN" altLang="en-US"/>
               <a:t>四级</a:t>
             </a:r>
+            <a:endParaRPr lang="zh-CN" altLang="en-US"/>
           </a:p>
           <a:p>
             <a:pPr lvl="4"/>
@@ -2314,6 +2350,7 @@
               <a:rPr lang="zh-CN" altLang="en-US"/>
               <a:t>五级</a:t>
             </a:r>
+            <a:endParaRPr lang="zh-CN" altLang="en-US"/>
           </a:p>
         </p:txBody>
       </p:sp>
@@ -2379,6 +2416,7 @@
               <a:rPr lang="zh-CN" altLang="en-US"/>
               <a:t>单击此处编辑母版文本样式</a:t>
             </a:r>
+            <a:endParaRPr lang="zh-CN" altLang="en-US"/>
           </a:p>
         </p:txBody>
       </p:sp>
@@ -2399,7 +2437,6 @@
           <a:p>
             <a:fld id="{837840E2-13A5-46A9-A265-C77FF1EECC77}" type="datetimeFigureOut">
               <a:rPr lang="zh-CN" altLang="en-US" smtClean="0"/>
-              <a:t>2025/11/6</a:t>
             </a:fld>
             <a:endParaRPr lang="zh-CN" altLang="en-US"/>
           </a:p>
@@ -2441,7 +2478,6 @@
           <a:p>
             <a:fld id="{079686F9-7E47-4853-B8F4-FBCF71CB48DC}" type="slidenum">
               <a:rPr lang="zh-CN" altLang="en-US" smtClean="0"/>
-              <a:t>‹#›</a:t>
             </a:fld>
             <a:endParaRPr lang="zh-CN" altLang="en-US"/>
           </a:p>
@@ -2500,6 +2536,7 @@
               <a:rPr lang="zh-CN" altLang="en-US"/>
               <a:t>单击此处编辑母版标题样式</a:t>
             </a:r>
+            <a:endParaRPr lang="zh-CN" altLang="en-US"/>
           </a:p>
         </p:txBody>
       </p:sp>
@@ -2626,6 +2663,7 @@
               <a:rPr lang="zh-CN" altLang="en-US"/>
               <a:t>单击此处编辑母版文本样式</a:t>
             </a:r>
+            <a:endParaRPr lang="zh-CN" altLang="en-US"/>
           </a:p>
         </p:txBody>
       </p:sp>
@@ -2646,7 +2684,6 @@
           <a:p>
             <a:fld id="{837840E2-13A5-46A9-A265-C77FF1EECC77}" type="datetimeFigureOut">
               <a:rPr lang="zh-CN" altLang="en-US" smtClean="0"/>
-              <a:t>2025/11/6</a:t>
             </a:fld>
             <a:endParaRPr lang="zh-CN" altLang="en-US"/>
           </a:p>
@@ -2688,7 +2725,6 @@
           <a:p>
             <a:fld id="{079686F9-7E47-4853-B8F4-FBCF71CB48DC}" type="slidenum">
               <a:rPr lang="zh-CN" altLang="en-US" smtClean="0"/>
-              <a:t>‹#›</a:t>
             </a:fld>
             <a:endParaRPr lang="zh-CN" altLang="en-US"/>
           </a:p>
@@ -2753,6 +2789,7 @@
               <a:rPr lang="zh-CN" altLang="en-US"/>
               <a:t>单击此处编辑母版标题样式</a:t>
             </a:r>
+            <a:endParaRPr lang="zh-CN" altLang="en-US"/>
           </a:p>
         </p:txBody>
       </p:sp>
@@ -2786,6 +2823,7 @@
               <a:rPr lang="zh-CN" altLang="en-US"/>
               <a:t>单击此处编辑母版文本样式</a:t>
             </a:r>
+            <a:endParaRPr lang="zh-CN" altLang="en-US"/>
           </a:p>
           <a:p>
             <a:pPr lvl="1"/>
@@ -2793,6 +2831,7 @@
               <a:rPr lang="zh-CN" altLang="en-US"/>
               <a:t>二级</a:t>
             </a:r>
+            <a:endParaRPr lang="zh-CN" altLang="en-US"/>
           </a:p>
           <a:p>
             <a:pPr lvl="2"/>
@@ -2800,6 +2839,7 @@
               <a:rPr lang="zh-CN" altLang="en-US"/>
               <a:t>三级</a:t>
             </a:r>
+            <a:endParaRPr lang="zh-CN" altLang="en-US"/>
           </a:p>
           <a:p>
             <a:pPr lvl="3"/>
@@ -2807,6 +2847,7 @@
               <a:rPr lang="zh-CN" altLang="en-US"/>
               <a:t>四级</a:t>
             </a:r>
+            <a:endParaRPr lang="zh-CN" altLang="en-US"/>
           </a:p>
           <a:p>
             <a:pPr lvl="4"/>
@@ -2814,6 +2855,7 @@
               <a:rPr lang="zh-CN" altLang="en-US"/>
               <a:t>五级</a:t>
             </a:r>
+            <a:endParaRPr lang="zh-CN" altLang="en-US"/>
           </a:p>
         </p:txBody>
       </p:sp>
@@ -2852,7 +2894,6 @@
           <a:p>
             <a:fld id="{837840E2-13A5-46A9-A265-C77FF1EECC77}" type="datetimeFigureOut">
               <a:rPr lang="zh-CN" altLang="en-US" smtClean="0"/>
-              <a:t>2025/11/6</a:t>
             </a:fld>
             <a:endParaRPr lang="zh-CN" altLang="en-US"/>
           </a:p>
@@ -2930,7 +2971,6 @@
           <a:p>
             <a:fld id="{079686F9-7E47-4853-B8F4-FBCF71CB48DC}" type="slidenum">
               <a:rPr lang="zh-CN" altLang="en-US" smtClean="0"/>
-              <a:t>‹#›</a:t>
             </a:fld>
             <a:endParaRPr lang="zh-CN" altLang="en-US"/>
           </a:p>
@@ -3453,6 +3493,9 @@
               </a:rPr>
               <a:t>种情况的测试例中验证了正确性</a:t>
             </a:r>
+            <a:endParaRPr lang="zh-CN" altLang="en-US" sz="2000" dirty="0">
+              <a:sym typeface="+mn-ea"/>
+            </a:endParaRPr>
           </a:p>
           <a:p>
             <a:pPr>
@@ -3490,6 +3533,9 @@
               </a:rPr>
               <a:t>30%</a:t>
             </a:r>
+            <a:endParaRPr lang="en-US" altLang="zh-CN" sz="2000" dirty="0">
+              <a:sym typeface="+mn-ea"/>
+            </a:endParaRPr>
           </a:p>
           <a:p>
             <a:pPr>
@@ -3603,6 +3649,9 @@
               </a:rPr>
               <a:t>数据集</a:t>
             </a:r>
+            <a:endParaRPr lang="zh-CN" altLang="en-US" sz="2000" dirty="0">
+              <a:sym typeface="+mn-ea"/>
+            </a:endParaRPr>
           </a:p>
           <a:p>
             <a:pPr>
@@ -3618,6 +3667,7 @@
               <a:rPr lang="zh-CN" altLang="en-US" sz="2000" dirty="0"/>
               <a:t>后续生成较为系统的实验方案</a:t>
             </a:r>
+            <a:endParaRPr lang="zh-CN" altLang="en-US" sz="2000" dirty="0"/>
           </a:p>
         </p:txBody>
       </p:sp>
@@ -3704,13 +3754,7 @@
       </p:sp>
       <p:sp>
         <p:nvSpPr>
-          <p:cNvPr id="4" name="文本框 3">
-            <a:extLst>
-              <a:ext uri="{FF2B5EF4-FFF2-40B4-BE49-F238E27FC236}">
-                <a16:creationId xmlns:a16="http://schemas.microsoft.com/office/drawing/2014/main" id="{8FCC2A03-2335-FE72-6AA5-9274954855B5}"/>
-              </a:ext>
-            </a:extLst>
-          </p:cNvPr>
+          <p:cNvPr id="4" name="文本框 3"/>
           <p:cNvSpPr txBox="1"/>
           <p:nvPr/>
         </p:nvSpPr>
@@ -3781,20 +3825,14 @@
       </p:sp>
       <p:pic>
         <p:nvPicPr>
-          <p:cNvPr id="6" name="图片 5">
-            <a:extLst>
-              <a:ext uri="{FF2B5EF4-FFF2-40B4-BE49-F238E27FC236}">
-                <a16:creationId xmlns:a16="http://schemas.microsoft.com/office/drawing/2014/main" id="{AD6ACC9F-8BE9-5DA2-FCC5-ADC9DB226614}"/>
-              </a:ext>
-            </a:extLst>
-          </p:cNvPr>
+          <p:cNvPr id="6" name="图片 5"/>
           <p:cNvPicPr>
             <a:picLocks noChangeAspect="1"/>
           </p:cNvPicPr>
           <p:nvPr/>
         </p:nvPicPr>
         <p:blipFill>
-          <a:blip r:embed="rId2"/>
+          <a:blip r:embed="rId1"/>
           <a:stretch>
             <a:fillRect/>
           </a:stretch>
@@ -3810,11 +3848,6 @@
         </p:spPr>
       </p:pic>
     </p:spTree>
-    <p:extLst>
-      <p:ext uri="{BB962C8B-B14F-4D97-AF65-F5344CB8AC3E}">
-        <p14:creationId xmlns:p14="http://schemas.microsoft.com/office/powerpoint/2010/main" val="1979519213"/>
-      </p:ext>
-    </p:extLst>
   </p:cSld>
   <p:clrMapOvr>
     <a:masterClrMapping/>
@@ -3848,7 +3881,7 @@
         <p:spPr>
           <a:xfrm>
             <a:off x="599090" y="302697"/>
-            <a:ext cx="5966698" cy="461665"/>
+            <a:ext cx="5798185" cy="460375"/>
           </a:xfrm>
           <a:prstGeom prst="rect">
             <a:avLst/>
@@ -3863,7 +3896,7 @@
           <a:p>
             <a:r>
               <a:rPr lang="zh-CN" altLang="en-US" sz="2400" dirty="0"/>
-              <a:t>二、进展</a:t>
+              <a:t>三、进展</a:t>
             </a:r>
             <a:r>
               <a:rPr lang="en-US" altLang="zh-CN" sz="2400" dirty="0"/>
@@ -3891,20 +3924,14 @@
       </p:sp>
       <p:pic>
         <p:nvPicPr>
-          <p:cNvPr id="5" name="图片 4">
-            <a:extLst>
-              <a:ext uri="{FF2B5EF4-FFF2-40B4-BE49-F238E27FC236}">
-                <a16:creationId xmlns:a16="http://schemas.microsoft.com/office/drawing/2014/main" id="{D02430F2-BE51-6632-8EB3-F905B7082AE7}"/>
-              </a:ext>
-            </a:extLst>
-          </p:cNvPr>
+          <p:cNvPr id="5" name="图片 4"/>
           <p:cNvPicPr>
             <a:picLocks noChangeAspect="1"/>
           </p:cNvPicPr>
           <p:nvPr/>
         </p:nvPicPr>
         <p:blipFill>
-          <a:blip r:embed="rId2"/>
+          <a:blip r:embed="rId1"/>
           <a:stretch>
             <a:fillRect/>
           </a:stretch>
@@ -3950,13 +3977,7 @@
       </p:pic>
       <p:sp>
         <p:nvSpPr>
-          <p:cNvPr id="7" name="箭头: 右 6">
-            <a:extLst>
-              <a:ext uri="{FF2B5EF4-FFF2-40B4-BE49-F238E27FC236}">
-                <a16:creationId xmlns:a16="http://schemas.microsoft.com/office/drawing/2014/main" id="{69ACFFBE-13AC-B7FD-D2C8-1566452326AA}"/>
-              </a:ext>
-            </a:extLst>
-          </p:cNvPr>
+          <p:cNvPr id="7" name="箭头: 右 6"/>
           <p:cNvSpPr/>
           <p:nvPr/>
         </p:nvSpPr>
@@ -3999,13 +4020,7 @@
       </p:sp>
       <p:sp>
         <p:nvSpPr>
-          <p:cNvPr id="8" name="文本框 7">
-            <a:extLst>
-              <a:ext uri="{FF2B5EF4-FFF2-40B4-BE49-F238E27FC236}">
-                <a16:creationId xmlns:a16="http://schemas.microsoft.com/office/drawing/2014/main" id="{FF1D7B43-C742-EB48-025D-E034556BF8B6}"/>
-              </a:ext>
-            </a:extLst>
-          </p:cNvPr>
+          <p:cNvPr id="8" name="文本框 7"/>
           <p:cNvSpPr txBox="1"/>
           <p:nvPr/>
         </p:nvSpPr>
@@ -4201,13 +4216,7 @@
       </p:sp>
       <p:sp>
         <p:nvSpPr>
-          <p:cNvPr id="9" name="箭头: 右 8">
-            <a:extLst>
-              <a:ext uri="{FF2B5EF4-FFF2-40B4-BE49-F238E27FC236}">
-                <a16:creationId xmlns:a16="http://schemas.microsoft.com/office/drawing/2014/main" id="{783D6BE3-24E4-9922-FD41-2D77233EDEAF}"/>
-              </a:ext>
-            </a:extLst>
-          </p:cNvPr>
+          <p:cNvPr id="9" name="箭头: 右 8"/>
           <p:cNvSpPr/>
           <p:nvPr/>
         </p:nvSpPr>
@@ -4250,13 +4259,7 @@
       </p:sp>
       <p:sp>
         <p:nvSpPr>
-          <p:cNvPr id="11" name="文本框 10">
-            <a:extLst>
-              <a:ext uri="{FF2B5EF4-FFF2-40B4-BE49-F238E27FC236}">
-                <a16:creationId xmlns:a16="http://schemas.microsoft.com/office/drawing/2014/main" id="{4F00FD14-6B5F-54B0-B5D1-5A79BD474558}"/>
-              </a:ext>
-            </a:extLst>
-          </p:cNvPr>
+          <p:cNvPr id="11" name="文本框 10"/>
           <p:cNvSpPr txBox="1"/>
           <p:nvPr/>
         </p:nvSpPr>
@@ -4300,11 +4303,6 @@
         </p:txBody>
       </p:sp>
     </p:spTree>
-    <p:extLst>
-      <p:ext uri="{BB962C8B-B14F-4D97-AF65-F5344CB8AC3E}">
-        <p14:creationId xmlns:p14="http://schemas.microsoft.com/office/powerpoint/2010/main" val="974559379"/>
-      </p:ext>
-    </p:extLst>
   </p:cSld>
   <p:clrMapOvr>
     <a:masterClrMapping/>
@@ -4338,7 +4336,7 @@
         <p:spPr>
           <a:xfrm>
             <a:off x="599090" y="302697"/>
-            <a:ext cx="5966698" cy="461665"/>
+            <a:ext cx="5798185" cy="460375"/>
           </a:xfrm>
           <a:prstGeom prst="rect">
             <a:avLst/>
@@ -4353,7 +4351,7 @@
           <a:p>
             <a:r>
               <a:rPr lang="zh-CN" altLang="en-US" sz="2400" dirty="0"/>
-              <a:t>二、进展</a:t>
+              <a:t>三、进展</a:t>
             </a:r>
             <a:r>
               <a:rPr lang="en-US" altLang="zh-CN" sz="2400" dirty="0"/>
@@ -4381,20 +4379,14 @@
       </p:sp>
       <p:pic>
         <p:nvPicPr>
-          <p:cNvPr id="5" name="图片 4">
-            <a:extLst>
-              <a:ext uri="{FF2B5EF4-FFF2-40B4-BE49-F238E27FC236}">
-                <a16:creationId xmlns:a16="http://schemas.microsoft.com/office/drawing/2014/main" id="{D02430F2-BE51-6632-8EB3-F905B7082AE7}"/>
-              </a:ext>
-            </a:extLst>
-          </p:cNvPr>
+          <p:cNvPr id="5" name="图片 4"/>
           <p:cNvPicPr>
             <a:picLocks noChangeAspect="1"/>
           </p:cNvPicPr>
           <p:nvPr/>
         </p:nvPicPr>
         <p:blipFill>
-          <a:blip r:embed="rId2"/>
+          <a:blip r:embed="rId1"/>
           <a:stretch>
             <a:fillRect/>
           </a:stretch>
@@ -4440,13 +4432,7 @@
       </p:pic>
       <p:sp>
         <p:nvSpPr>
-          <p:cNvPr id="7" name="箭头: 右 6">
-            <a:extLst>
-              <a:ext uri="{FF2B5EF4-FFF2-40B4-BE49-F238E27FC236}">
-                <a16:creationId xmlns:a16="http://schemas.microsoft.com/office/drawing/2014/main" id="{69ACFFBE-13AC-B7FD-D2C8-1566452326AA}"/>
-              </a:ext>
-            </a:extLst>
-          </p:cNvPr>
+          <p:cNvPr id="7" name="箭头: 右 6"/>
           <p:cNvSpPr/>
           <p:nvPr/>
         </p:nvSpPr>
@@ -4489,20 +4475,14 @@
       </p:sp>
       <p:pic>
         <p:nvPicPr>
-          <p:cNvPr id="10" name="图片 9">
-            <a:extLst>
-              <a:ext uri="{FF2B5EF4-FFF2-40B4-BE49-F238E27FC236}">
-                <a16:creationId xmlns:a16="http://schemas.microsoft.com/office/drawing/2014/main" id="{5966C91F-987D-CF13-EF64-596CD0BD139E}"/>
-              </a:ext>
-            </a:extLst>
-          </p:cNvPr>
+          <p:cNvPr id="10" name="图片 9"/>
           <p:cNvPicPr>
             <a:picLocks noChangeAspect="1"/>
           </p:cNvPicPr>
           <p:nvPr/>
         </p:nvPicPr>
         <p:blipFill>
-          <a:blip r:embed="rId3"/>
+          <a:blip r:embed="rId2"/>
           <a:stretch>
             <a:fillRect/>
           </a:stretch>
@@ -4519,13 +4499,7 @@
       </p:pic>
       <p:sp>
         <p:nvSpPr>
-          <p:cNvPr id="12" name="文本框 11">
-            <a:extLst>
-              <a:ext uri="{FF2B5EF4-FFF2-40B4-BE49-F238E27FC236}">
-                <a16:creationId xmlns:a16="http://schemas.microsoft.com/office/drawing/2014/main" id="{8BE0264F-9C79-B584-A128-78EF5620913D}"/>
-              </a:ext>
-            </a:extLst>
-          </p:cNvPr>
+          <p:cNvPr id="12" name="文本框 11"/>
           <p:cNvSpPr txBox="1"/>
           <p:nvPr/>
         </p:nvSpPr>
@@ -4569,11 +4543,6 @@
         </p:txBody>
       </p:sp>
     </p:spTree>
-    <p:extLst>
-      <p:ext uri="{BB962C8B-B14F-4D97-AF65-F5344CB8AC3E}">
-        <p14:creationId xmlns:p14="http://schemas.microsoft.com/office/powerpoint/2010/main" val="4193309033"/>
-      </p:ext>
-    </p:extLst>
   </p:cSld>
   <p:clrMapOvr>
     <a:masterClrMapping/>
@@ -4607,7 +4576,7 @@
         <p:spPr>
           <a:xfrm>
             <a:off x="599090" y="302697"/>
-            <a:ext cx="5966698" cy="461665"/>
+            <a:ext cx="5798185" cy="460375"/>
           </a:xfrm>
           <a:prstGeom prst="rect">
             <a:avLst/>
@@ -4622,7 +4591,7 @@
           <a:p>
             <a:r>
               <a:rPr lang="zh-CN" altLang="en-US" sz="2400" dirty="0"/>
-              <a:t>二、进展</a:t>
+              <a:t>三、进展</a:t>
             </a:r>
             <a:r>
               <a:rPr lang="en-US" altLang="zh-CN" sz="2400" dirty="0"/>
@@ -4650,13 +4619,7 @@
       </p:sp>
       <p:sp>
         <p:nvSpPr>
-          <p:cNvPr id="3" name="文本框 2">
-            <a:extLst>
-              <a:ext uri="{FF2B5EF4-FFF2-40B4-BE49-F238E27FC236}">
-                <a16:creationId xmlns:a16="http://schemas.microsoft.com/office/drawing/2014/main" id="{B2E65A4F-DAC0-A935-0A0C-F83726F3BAF5}"/>
-              </a:ext>
-            </a:extLst>
-          </p:cNvPr>
+          <p:cNvPr id="3" name="文本框 2"/>
           <p:cNvSpPr txBox="1"/>
           <p:nvPr/>
         </p:nvSpPr>
@@ -4707,20 +4670,14 @@
       </p:sp>
       <p:pic>
         <p:nvPicPr>
-          <p:cNvPr id="6" name="图片 5">
-            <a:extLst>
-              <a:ext uri="{FF2B5EF4-FFF2-40B4-BE49-F238E27FC236}">
-                <a16:creationId xmlns:a16="http://schemas.microsoft.com/office/drawing/2014/main" id="{BDD98982-2541-7B5A-74E2-199751C89AFE}"/>
-              </a:ext>
-            </a:extLst>
-          </p:cNvPr>
+          <p:cNvPr id="6" name="图片 5"/>
           <p:cNvPicPr>
             <a:picLocks noChangeAspect="1"/>
           </p:cNvPicPr>
           <p:nvPr/>
         </p:nvPicPr>
         <p:blipFill>
-          <a:blip r:embed="rId2"/>
+          <a:blip r:embed="rId1"/>
           <a:stretch>
             <a:fillRect/>
           </a:stretch>
@@ -4737,20 +4694,14 @@
       </p:pic>
       <p:pic>
         <p:nvPicPr>
-          <p:cNvPr id="9" name="图片 8">
-            <a:extLst>
-              <a:ext uri="{FF2B5EF4-FFF2-40B4-BE49-F238E27FC236}">
-                <a16:creationId xmlns:a16="http://schemas.microsoft.com/office/drawing/2014/main" id="{1C88869B-89CB-6246-5270-FC411ADF3F24}"/>
-              </a:ext>
-            </a:extLst>
-          </p:cNvPr>
+          <p:cNvPr id="9" name="图片 8"/>
           <p:cNvPicPr>
             <a:picLocks noChangeAspect="1"/>
           </p:cNvPicPr>
           <p:nvPr/>
         </p:nvPicPr>
         <p:blipFill>
-          <a:blip r:embed="rId3"/>
+          <a:blip r:embed="rId2"/>
           <a:stretch>
             <a:fillRect/>
           </a:stretch>
@@ -4766,11 +4717,6 @@
         </p:spPr>
       </p:pic>
     </p:spTree>
-    <p:extLst>
-      <p:ext uri="{BB962C8B-B14F-4D97-AF65-F5344CB8AC3E}">
-        <p14:creationId xmlns:p14="http://schemas.microsoft.com/office/powerpoint/2010/main" val="2211437878"/>
-      </p:ext>
-    </p:extLst>
   </p:cSld>
   <p:clrMapOvr>
     <a:masterClrMapping/>
@@ -4804,7 +4750,7 @@
         <p:spPr>
           <a:xfrm>
             <a:off x="599090" y="302697"/>
-            <a:ext cx="5966698" cy="461665"/>
+            <a:ext cx="5798185" cy="460375"/>
           </a:xfrm>
           <a:prstGeom prst="rect">
             <a:avLst/>
@@ -4819,7 +4765,7 @@
           <a:p>
             <a:r>
               <a:rPr lang="zh-CN" altLang="en-US" sz="2400" dirty="0"/>
-              <a:t>二、进展</a:t>
+              <a:t>三、进展</a:t>
             </a:r>
             <a:r>
               <a:rPr lang="en-US" altLang="zh-CN" sz="2400" dirty="0"/>
@@ -4847,13 +4793,7 @@
       </p:sp>
       <p:sp>
         <p:nvSpPr>
-          <p:cNvPr id="3" name="文本框 2">
-            <a:extLst>
-              <a:ext uri="{FF2B5EF4-FFF2-40B4-BE49-F238E27FC236}">
-                <a16:creationId xmlns:a16="http://schemas.microsoft.com/office/drawing/2014/main" id="{B2E65A4F-DAC0-A935-0A0C-F83726F3BAF5}"/>
-              </a:ext>
-            </a:extLst>
-          </p:cNvPr>
+          <p:cNvPr id="3" name="文本框 2"/>
           <p:cNvSpPr txBox="1"/>
           <p:nvPr/>
         </p:nvSpPr>
@@ -4904,20 +4844,14 @@
       </p:sp>
       <p:pic>
         <p:nvPicPr>
-          <p:cNvPr id="6" name="图片 5">
-            <a:extLst>
-              <a:ext uri="{FF2B5EF4-FFF2-40B4-BE49-F238E27FC236}">
-                <a16:creationId xmlns:a16="http://schemas.microsoft.com/office/drawing/2014/main" id="{BDD98982-2541-7B5A-74E2-199751C89AFE}"/>
-              </a:ext>
-            </a:extLst>
-          </p:cNvPr>
+          <p:cNvPr id="6" name="图片 5"/>
           <p:cNvPicPr>
             <a:picLocks noChangeAspect="1"/>
           </p:cNvPicPr>
           <p:nvPr/>
         </p:nvPicPr>
         <p:blipFill>
-          <a:blip r:embed="rId2"/>
+          <a:blip r:embed="rId1"/>
           <a:stretch>
             <a:fillRect/>
           </a:stretch>
@@ -4933,11 +4867,6 @@
         </p:spPr>
       </p:pic>
     </p:spTree>
-    <p:extLst>
-      <p:ext uri="{BB962C8B-B14F-4D97-AF65-F5344CB8AC3E}">
-        <p14:creationId xmlns:p14="http://schemas.microsoft.com/office/powerpoint/2010/main" val="2219999299"/>
-      </p:ext>
-    </p:extLst>
   </p:cSld>
   <p:clrMapOvr>
     <a:masterClrMapping/>
@@ -4971,7 +4900,7 @@
         <p:spPr>
           <a:xfrm>
             <a:off x="599090" y="302697"/>
-            <a:ext cx="5966698" cy="461665"/>
+            <a:ext cx="5798185" cy="460375"/>
           </a:xfrm>
           <a:prstGeom prst="rect">
             <a:avLst/>
@@ -4986,7 +4915,7 @@
           <a:p>
             <a:r>
               <a:rPr lang="zh-CN" altLang="en-US" sz="2400" dirty="0"/>
-              <a:t>二、进展</a:t>
+              <a:t>三、进展</a:t>
             </a:r>
             <a:r>
               <a:rPr lang="en-US" altLang="zh-CN" sz="2400" dirty="0"/>
@@ -5014,13 +4943,7 @@
       </p:sp>
       <p:sp>
         <p:nvSpPr>
-          <p:cNvPr id="3" name="文本框 2">
-            <a:extLst>
-              <a:ext uri="{FF2B5EF4-FFF2-40B4-BE49-F238E27FC236}">
-                <a16:creationId xmlns:a16="http://schemas.microsoft.com/office/drawing/2014/main" id="{B2E65A4F-DAC0-A935-0A0C-F83726F3BAF5}"/>
-              </a:ext>
-            </a:extLst>
-          </p:cNvPr>
+          <p:cNvPr id="3" name="文本框 2"/>
           <p:cNvSpPr txBox="1"/>
           <p:nvPr/>
         </p:nvSpPr>
@@ -5071,13 +4994,31 @@
       </p:sp>
       <p:pic>
         <p:nvPicPr>
-          <p:cNvPr id="6" name="图片 5">
-            <a:extLst>
-              <a:ext uri="{FF2B5EF4-FFF2-40B4-BE49-F238E27FC236}">
-                <a16:creationId xmlns:a16="http://schemas.microsoft.com/office/drawing/2014/main" id="{BDD98982-2541-7B5A-74E2-199751C89AFE}"/>
-              </a:ext>
-            </a:extLst>
-          </p:cNvPr>
+          <p:cNvPr id="5" name="图片 4"/>
+          <p:cNvPicPr>
+            <a:picLocks noChangeAspect="1"/>
+          </p:cNvPicPr>
+          <p:nvPr/>
+        </p:nvPicPr>
+        <p:blipFill>
+          <a:blip r:embed="rId1"/>
+          <a:stretch>
+            <a:fillRect/>
+          </a:stretch>
+        </p:blipFill>
+        <p:spPr>
+          <a:xfrm>
+            <a:off x="276860" y="1663065"/>
+            <a:ext cx="11142345" cy="4368165"/>
+          </a:xfrm>
+          <a:prstGeom prst="rect">
+            <a:avLst/>
+          </a:prstGeom>
+        </p:spPr>
+      </p:pic>
+      <p:pic>
+        <p:nvPicPr>
+          <p:cNvPr id="7" name="图片 6"/>
           <p:cNvPicPr>
             <a:picLocks noChangeAspect="1"/>
           </p:cNvPicPr>
@@ -5091,8 +5032,32 @@
         </p:blipFill>
         <p:spPr>
           <a:xfrm>
-            <a:off x="245941" y="1566496"/>
-            <a:ext cx="11119476" cy="4001998"/>
+            <a:off x="5384800" y="677545"/>
+            <a:ext cx="2959100" cy="5556885"/>
+          </a:xfrm>
+          <a:prstGeom prst="rect">
+            <a:avLst/>
+          </a:prstGeom>
+        </p:spPr>
+      </p:pic>
+      <p:pic>
+        <p:nvPicPr>
+          <p:cNvPr id="8" name="图片 7"/>
+          <p:cNvPicPr>
+            <a:picLocks noChangeAspect="1"/>
+          </p:cNvPicPr>
+          <p:nvPr/>
+        </p:nvPicPr>
+        <p:blipFill>
+          <a:blip r:embed="rId3"/>
+          <a:stretch>
+            <a:fillRect/>
+          </a:stretch>
+        </p:blipFill>
+        <p:spPr>
+          <a:xfrm>
+            <a:off x="8303895" y="677545"/>
+            <a:ext cx="3655695" cy="5564505"/>
           </a:xfrm>
           <a:prstGeom prst="rect">
             <a:avLst/>
@@ -5100,11 +5065,1056 @@
         </p:spPr>
       </p:pic>
     </p:spTree>
-    <p:extLst>
-      <p:ext uri="{BB962C8B-B14F-4D97-AF65-F5344CB8AC3E}">
-        <p14:creationId xmlns:p14="http://schemas.microsoft.com/office/powerpoint/2010/main" val="4062121218"/>
-      </p:ext>
-    </p:extLst>
+  </p:cSld>
+  <p:clrMapOvr>
+    <a:masterClrMapping/>
+  </p:clrMapOvr>
+</p:sld>
+</file>
+
+<file path=ppt/slides/slide16.xml><?xml version="1.0" encoding="utf-8"?>
+<p:sld xmlns:a="http://schemas.openxmlformats.org/drawingml/2006/main" xmlns:r="http://schemas.openxmlformats.org/officeDocument/2006/relationships" xmlns:p="http://schemas.openxmlformats.org/presentationml/2006/main">
+  <p:cSld>
+    <p:spTree>
+      <p:nvGrpSpPr>
+        <p:cNvPr id="1" name=""/>
+        <p:cNvGrpSpPr/>
+        <p:nvPr/>
+      </p:nvGrpSpPr>
+      <p:grpSpPr>
+        <a:xfrm>
+          <a:off x="0" y="0"/>
+          <a:ext cx="0" cy="0"/>
+          <a:chOff x="0" y="0"/>
+          <a:chExt cx="0" cy="0"/>
+        </a:xfrm>
+      </p:grpSpPr>
+      <p:sp>
+        <p:nvSpPr>
+          <p:cNvPr id="2" name="文本框 1"/>
+          <p:cNvSpPr txBox="1"/>
+          <p:nvPr/>
+        </p:nvSpPr>
+        <p:spPr>
+          <a:xfrm>
+            <a:off x="599090" y="302697"/>
+            <a:ext cx="5798185" cy="460375"/>
+          </a:xfrm>
+          <a:prstGeom prst="rect">
+            <a:avLst/>
+          </a:prstGeom>
+          <a:noFill/>
+        </p:spPr>
+        <p:txBody>
+          <a:bodyPr wrap="none" rtlCol="0">
+            <a:spAutoFit/>
+          </a:bodyPr>
+          <a:lstStyle/>
+          <a:p>
+            <a:r>
+              <a:rPr lang="zh-CN" altLang="en-US" sz="2400" dirty="0"/>
+              <a:t>三、进展</a:t>
+            </a:r>
+            <a:r>
+              <a:rPr lang="en-US" altLang="zh-CN" sz="2400" dirty="0"/>
+              <a:t>2</a:t>
+            </a:r>
+            <a:r>
+              <a:rPr lang="zh-CN" altLang="en-US" sz="2400" dirty="0"/>
+              <a:t>：</a:t>
+            </a:r>
+            <a:r>
+              <a:rPr lang="en-US" altLang="zh-CN" sz="2400" dirty="0">
+                <a:sym typeface="+mn-ea"/>
+              </a:rPr>
+              <a:t>COT</a:t>
+            </a:r>
+            <a:r>
+              <a:rPr lang="zh-CN" altLang="en-US" sz="2400" dirty="0">
+                <a:sym typeface="+mn-ea"/>
+              </a:rPr>
+              <a:t>生成器的结构简化与优化</a:t>
+            </a:r>
+            <a:endParaRPr lang="zh-CN" altLang="en-US" sz="2400" dirty="0"/>
+          </a:p>
+        </p:txBody>
+      </p:sp>
+      <p:sp>
+        <p:nvSpPr>
+          <p:cNvPr id="3" name="文本框 2"/>
+          <p:cNvSpPr txBox="1"/>
+          <p:nvPr/>
+        </p:nvSpPr>
+        <p:spPr>
+          <a:xfrm>
+            <a:off x="599090" y="932609"/>
+            <a:ext cx="6610760" cy="465640"/>
+          </a:xfrm>
+          <a:prstGeom prst="rect">
+            <a:avLst/>
+          </a:prstGeom>
+          <a:noFill/>
+        </p:spPr>
+        <p:txBody>
+          <a:bodyPr wrap="square">
+            <a:spAutoFit/>
+          </a:bodyPr>
+          <a:lstStyle/>
+          <a:p>
+            <a:pPr>
+              <a:lnSpc>
+                <a:spcPct val="150000"/>
+              </a:lnSpc>
+            </a:pPr>
+            <a:r>
+              <a:rPr lang="zh-CN" altLang="en-US" dirty="0">
+                <a:sym typeface="+mn-ea"/>
+              </a:rPr>
+              <a:t>其他例子：同样起到了简化</a:t>
+            </a:r>
+            <a:r>
+              <a:rPr lang="en-US" altLang="zh-CN" dirty="0">
+                <a:sym typeface="+mn-ea"/>
+              </a:rPr>
+              <a:t>cot</a:t>
+            </a:r>
+            <a:r>
+              <a:rPr lang="zh-CN" altLang="en-US" dirty="0">
+                <a:sym typeface="+mn-ea"/>
+              </a:rPr>
+              <a:t>的作用</a:t>
+            </a:r>
+            <a:endParaRPr lang="en-US" altLang="zh-CN" dirty="0">
+              <a:sym typeface="+mn-ea"/>
+            </a:endParaRPr>
+          </a:p>
+        </p:txBody>
+      </p:sp>
+      <p:pic>
+        <p:nvPicPr>
+          <p:cNvPr id="5" name="图片 4"/>
+          <p:cNvPicPr>
+            <a:picLocks noChangeAspect="1"/>
+          </p:cNvPicPr>
+          <p:nvPr/>
+        </p:nvPicPr>
+        <p:blipFill>
+          <a:blip r:embed="rId1"/>
+          <a:stretch>
+            <a:fillRect/>
+          </a:stretch>
+        </p:blipFill>
+        <p:spPr>
+          <a:xfrm>
+            <a:off x="276860" y="1663065"/>
+            <a:ext cx="11142345" cy="4368165"/>
+          </a:xfrm>
+          <a:prstGeom prst="rect">
+            <a:avLst/>
+          </a:prstGeom>
+        </p:spPr>
+      </p:pic>
+    </p:spTree>
+  </p:cSld>
+  <p:clrMapOvr>
+    <a:masterClrMapping/>
+  </p:clrMapOvr>
+</p:sld>
+</file>
+
+<file path=ppt/slides/slide17.xml><?xml version="1.0" encoding="utf-8"?>
+<p:sld xmlns:a="http://schemas.openxmlformats.org/drawingml/2006/main" xmlns:r="http://schemas.openxmlformats.org/officeDocument/2006/relationships" xmlns:p="http://schemas.openxmlformats.org/presentationml/2006/main">
+  <p:cSld>
+    <p:spTree>
+      <p:nvGrpSpPr>
+        <p:cNvPr id="1" name=""/>
+        <p:cNvGrpSpPr/>
+        <p:nvPr/>
+      </p:nvGrpSpPr>
+      <p:grpSpPr>
+        <a:xfrm>
+          <a:off x="0" y="0"/>
+          <a:ext cx="0" cy="0"/>
+          <a:chOff x="0" y="0"/>
+          <a:chExt cx="0" cy="0"/>
+        </a:xfrm>
+      </p:grpSpPr>
+      <p:sp>
+        <p:nvSpPr>
+          <p:cNvPr id="2" name="文本框 1"/>
+          <p:cNvSpPr txBox="1"/>
+          <p:nvPr/>
+        </p:nvSpPr>
+        <p:spPr>
+          <a:xfrm>
+            <a:off x="599090" y="302697"/>
+            <a:ext cx="5934710" cy="460375"/>
+          </a:xfrm>
+          <a:prstGeom prst="rect">
+            <a:avLst/>
+          </a:prstGeom>
+          <a:noFill/>
+        </p:spPr>
+        <p:txBody>
+          <a:bodyPr wrap="none" rtlCol="0">
+            <a:spAutoFit/>
+          </a:bodyPr>
+          <a:lstStyle/>
+          <a:p>
+            <a:pPr algn="l"/>
+            <a:r>
+              <a:rPr lang="zh-CN" altLang="en-US" sz="2400" dirty="0"/>
+              <a:t>四、进展</a:t>
+            </a:r>
+            <a:r>
+              <a:rPr lang="en-US" altLang="zh-CN" sz="2400" dirty="0"/>
+              <a:t>3</a:t>
+            </a:r>
+            <a:r>
+              <a:rPr lang="zh-CN" altLang="en-US" sz="2400" dirty="0"/>
+              <a:t>：</a:t>
+            </a:r>
+            <a:r>
+              <a:rPr lang="zh-CN" altLang="en-US" sz="2400" dirty="0">
+                <a:sym typeface="+mn-ea"/>
+              </a:rPr>
+              <a:t>正序和倒叙两种</a:t>
+            </a:r>
+            <a:r>
+              <a:rPr lang="en-US" altLang="zh-CN" sz="2400" dirty="0">
+                <a:sym typeface="+mn-ea"/>
+              </a:rPr>
+              <a:t>cot</a:t>
+            </a:r>
+            <a:r>
+              <a:rPr lang="zh-CN" altLang="en-US" sz="2400" dirty="0">
+                <a:sym typeface="+mn-ea"/>
+              </a:rPr>
+              <a:t>的生成</a:t>
+            </a:r>
+            <a:r>
+              <a:rPr lang="zh-CN" altLang="en-US" sz="2400" dirty="0">
+                <a:sym typeface="+mn-ea"/>
+              </a:rPr>
+              <a:t>机制</a:t>
+            </a:r>
+            <a:endParaRPr lang="zh-CN" altLang="en-US" sz="2400" dirty="0">
+              <a:sym typeface="+mn-ea"/>
+            </a:endParaRPr>
+          </a:p>
+        </p:txBody>
+      </p:sp>
+      <p:sp>
+        <p:nvSpPr>
+          <p:cNvPr id="5" name="文本框 4"/>
+          <p:cNvSpPr txBox="1"/>
+          <p:nvPr/>
+        </p:nvSpPr>
+        <p:spPr>
+          <a:xfrm>
+            <a:off x="513080" y="686435"/>
+            <a:ext cx="8218170" cy="1753235"/>
+          </a:xfrm>
+          <a:prstGeom prst="rect">
+            <a:avLst/>
+          </a:prstGeom>
+          <a:noFill/>
+        </p:spPr>
+        <p:txBody>
+          <a:bodyPr wrap="square" rtlCol="0" anchor="t">
+            <a:spAutoFit/>
+          </a:bodyPr>
+          <a:p>
+            <a:pPr>
+              <a:lnSpc>
+                <a:spcPct val="200000"/>
+              </a:lnSpc>
+            </a:pPr>
+            <a:r>
+              <a:rPr lang="zh-CN" altLang="en-US" b="1" dirty="0">
+                <a:sym typeface="+mn-ea"/>
+              </a:rPr>
+              <a:t>问题</a:t>
+            </a:r>
+            <a:r>
+              <a:rPr lang="zh-CN" altLang="en-US" dirty="0">
+                <a:sym typeface="+mn-ea"/>
+              </a:rPr>
+              <a:t>：原框架的</a:t>
+            </a:r>
+            <a:r>
+              <a:rPr lang="en-US" altLang="zh-CN" dirty="0">
+                <a:sym typeface="+mn-ea"/>
+              </a:rPr>
+              <a:t>cot</a:t>
+            </a:r>
+            <a:r>
+              <a:rPr lang="zh-CN" altLang="en-US" dirty="0">
+                <a:sym typeface="+mn-ea"/>
+              </a:rPr>
+              <a:t>仅仅有正序，在输出预测输入的评估集体系中表现</a:t>
+            </a:r>
+            <a:r>
+              <a:rPr lang="zh-CN" altLang="en-US" dirty="0">
+                <a:sym typeface="+mn-ea"/>
+              </a:rPr>
+              <a:t>一般</a:t>
+            </a:r>
+            <a:endParaRPr lang="zh-CN" altLang="en-US" dirty="0">
+              <a:sym typeface="+mn-ea"/>
+            </a:endParaRPr>
+          </a:p>
+          <a:p>
+            <a:pPr>
+              <a:lnSpc>
+                <a:spcPct val="200000"/>
+              </a:lnSpc>
+            </a:pPr>
+            <a:r>
+              <a:rPr lang="zh-CN" altLang="en-US" b="1" dirty="0">
+                <a:sym typeface="+mn-ea"/>
+              </a:rPr>
+              <a:t>解决方案</a:t>
+            </a:r>
+            <a:r>
+              <a:rPr lang="zh-CN" altLang="en-US" dirty="0">
+                <a:sym typeface="+mn-ea"/>
+              </a:rPr>
+              <a:t>：根据目前地框架，扩展一个生成倒叙</a:t>
+            </a:r>
+            <a:r>
+              <a:rPr lang="en-US" altLang="zh-CN" dirty="0">
+                <a:sym typeface="+mn-ea"/>
+              </a:rPr>
+              <a:t>cot</a:t>
+            </a:r>
+            <a:r>
+              <a:rPr lang="zh-CN" altLang="en-US" dirty="0">
+                <a:sym typeface="+mn-ea"/>
+              </a:rPr>
+              <a:t>的组件</a:t>
+            </a:r>
+            <a:endParaRPr lang="zh-CN" altLang="en-US" b="1" dirty="0">
+              <a:sym typeface="+mn-ea"/>
+            </a:endParaRPr>
+          </a:p>
+          <a:p>
+            <a:pPr>
+              <a:lnSpc>
+                <a:spcPct val="200000"/>
+              </a:lnSpc>
+            </a:pPr>
+            <a:r>
+              <a:rPr lang="zh-CN" altLang="en-US" b="1" dirty="0">
+                <a:sym typeface="+mn-ea"/>
+              </a:rPr>
+              <a:t>技术方案</a:t>
+            </a:r>
+            <a:r>
+              <a:rPr lang="zh-CN" altLang="en-US" dirty="0">
+                <a:sym typeface="+mn-ea"/>
+              </a:rPr>
+              <a:t>：类似于</a:t>
+            </a:r>
+            <a:r>
+              <a:rPr lang="en-US" altLang="zh-CN" dirty="0">
+                <a:sym typeface="+mn-ea"/>
+              </a:rPr>
+              <a:t>cot</a:t>
+            </a:r>
+            <a:r>
+              <a:rPr lang="zh-CN" altLang="en-US" dirty="0">
+                <a:sym typeface="+mn-ea"/>
+              </a:rPr>
+              <a:t>结构，做倒叙</a:t>
+            </a:r>
+            <a:r>
+              <a:rPr lang="zh-CN" altLang="en-US" dirty="0">
+                <a:sym typeface="+mn-ea"/>
+              </a:rPr>
+              <a:t>复现</a:t>
+            </a:r>
+            <a:endParaRPr lang="zh-CN" altLang="en-US" dirty="0">
+              <a:sym typeface="+mn-ea"/>
+            </a:endParaRPr>
+          </a:p>
+        </p:txBody>
+      </p:sp>
+      <p:pic>
+        <p:nvPicPr>
+          <p:cNvPr id="7" name="图片 6"/>
+          <p:cNvPicPr>
+            <a:picLocks noChangeAspect="1"/>
+          </p:cNvPicPr>
+          <p:nvPr/>
+        </p:nvPicPr>
+        <p:blipFill>
+          <a:blip r:embed="rId1"/>
+          <a:stretch>
+            <a:fillRect/>
+          </a:stretch>
+        </p:blipFill>
+        <p:spPr>
+          <a:xfrm>
+            <a:off x="466725" y="2439670"/>
+            <a:ext cx="10934065" cy="4464685"/>
+          </a:xfrm>
+          <a:prstGeom prst="rect">
+            <a:avLst/>
+          </a:prstGeom>
+        </p:spPr>
+      </p:pic>
+    </p:spTree>
+  </p:cSld>
+  <p:clrMapOvr>
+    <a:masterClrMapping/>
+  </p:clrMapOvr>
+</p:sld>
+</file>
+
+<file path=ppt/slides/slide18.xml><?xml version="1.0" encoding="utf-8"?>
+<p:sld xmlns:a="http://schemas.openxmlformats.org/drawingml/2006/main" xmlns:r="http://schemas.openxmlformats.org/officeDocument/2006/relationships" xmlns:p="http://schemas.openxmlformats.org/presentationml/2006/main">
+  <p:cSld>
+    <p:spTree>
+      <p:nvGrpSpPr>
+        <p:cNvPr id="1" name=""/>
+        <p:cNvGrpSpPr/>
+        <p:nvPr/>
+      </p:nvGrpSpPr>
+      <p:grpSpPr>
+        <a:xfrm>
+          <a:off x="0" y="0"/>
+          <a:ext cx="0" cy="0"/>
+          <a:chOff x="0" y="0"/>
+          <a:chExt cx="0" cy="0"/>
+        </a:xfrm>
+      </p:grpSpPr>
+      <p:sp>
+        <p:nvSpPr>
+          <p:cNvPr id="2" name="文本框 1"/>
+          <p:cNvSpPr txBox="1"/>
+          <p:nvPr/>
+        </p:nvSpPr>
+        <p:spPr>
+          <a:xfrm>
+            <a:off x="599090" y="302697"/>
+            <a:ext cx="5934710" cy="460375"/>
+          </a:xfrm>
+          <a:prstGeom prst="rect">
+            <a:avLst/>
+          </a:prstGeom>
+          <a:noFill/>
+        </p:spPr>
+        <p:txBody>
+          <a:bodyPr wrap="none" rtlCol="0">
+            <a:spAutoFit/>
+          </a:bodyPr>
+          <a:lstStyle/>
+          <a:p>
+            <a:pPr algn="l"/>
+            <a:r>
+              <a:rPr lang="zh-CN" altLang="en-US" sz="2400" dirty="0"/>
+              <a:t>四、进展</a:t>
+            </a:r>
+            <a:r>
+              <a:rPr lang="en-US" altLang="zh-CN" sz="2400" dirty="0"/>
+              <a:t>3</a:t>
+            </a:r>
+            <a:r>
+              <a:rPr lang="zh-CN" altLang="en-US" sz="2400" dirty="0"/>
+              <a:t>：</a:t>
+            </a:r>
+            <a:r>
+              <a:rPr lang="zh-CN" altLang="en-US" sz="2400" dirty="0">
+                <a:sym typeface="+mn-ea"/>
+              </a:rPr>
+              <a:t>正序和倒叙两种</a:t>
+            </a:r>
+            <a:r>
+              <a:rPr lang="en-US" altLang="zh-CN" sz="2400" dirty="0">
+                <a:sym typeface="+mn-ea"/>
+              </a:rPr>
+              <a:t>cot</a:t>
+            </a:r>
+            <a:r>
+              <a:rPr lang="zh-CN" altLang="en-US" sz="2400" dirty="0">
+                <a:sym typeface="+mn-ea"/>
+              </a:rPr>
+              <a:t>的生成</a:t>
+            </a:r>
+            <a:r>
+              <a:rPr lang="zh-CN" altLang="en-US" sz="2400" dirty="0">
+                <a:sym typeface="+mn-ea"/>
+              </a:rPr>
+              <a:t>机制</a:t>
+            </a:r>
+            <a:endParaRPr lang="zh-CN" altLang="en-US" sz="2400" dirty="0">
+              <a:sym typeface="+mn-ea"/>
+            </a:endParaRPr>
+          </a:p>
+        </p:txBody>
+      </p:sp>
+      <p:sp>
+        <p:nvSpPr>
+          <p:cNvPr id="5" name="文本框 4"/>
+          <p:cNvSpPr txBox="1"/>
+          <p:nvPr/>
+        </p:nvSpPr>
+        <p:spPr>
+          <a:xfrm>
+            <a:off x="513080" y="686435"/>
+            <a:ext cx="8218170" cy="1753235"/>
+          </a:xfrm>
+          <a:prstGeom prst="rect">
+            <a:avLst/>
+          </a:prstGeom>
+          <a:noFill/>
+        </p:spPr>
+        <p:txBody>
+          <a:bodyPr wrap="square" rtlCol="0" anchor="t">
+            <a:spAutoFit/>
+          </a:bodyPr>
+          <a:p>
+            <a:pPr>
+              <a:lnSpc>
+                <a:spcPct val="200000"/>
+              </a:lnSpc>
+            </a:pPr>
+            <a:r>
+              <a:rPr lang="zh-CN" altLang="en-US" b="1" dirty="0">
+                <a:sym typeface="+mn-ea"/>
+              </a:rPr>
+              <a:t>问题</a:t>
+            </a:r>
+            <a:r>
+              <a:rPr lang="zh-CN" altLang="en-US" dirty="0">
+                <a:sym typeface="+mn-ea"/>
+              </a:rPr>
+              <a:t>：原框架的</a:t>
+            </a:r>
+            <a:r>
+              <a:rPr lang="en-US" altLang="zh-CN" dirty="0">
+                <a:sym typeface="+mn-ea"/>
+              </a:rPr>
+              <a:t>cot</a:t>
+            </a:r>
+            <a:r>
+              <a:rPr lang="zh-CN" altLang="en-US" dirty="0">
+                <a:sym typeface="+mn-ea"/>
+              </a:rPr>
+              <a:t>仅仅有正序，在输出预测输入的评估集体系中表现</a:t>
+            </a:r>
+            <a:r>
+              <a:rPr lang="zh-CN" altLang="en-US" dirty="0">
+                <a:sym typeface="+mn-ea"/>
+              </a:rPr>
+              <a:t>一般</a:t>
+            </a:r>
+            <a:endParaRPr lang="zh-CN" altLang="en-US" dirty="0">
+              <a:sym typeface="+mn-ea"/>
+            </a:endParaRPr>
+          </a:p>
+          <a:p>
+            <a:pPr>
+              <a:lnSpc>
+                <a:spcPct val="200000"/>
+              </a:lnSpc>
+            </a:pPr>
+            <a:r>
+              <a:rPr lang="zh-CN" altLang="en-US" b="1" dirty="0">
+                <a:sym typeface="+mn-ea"/>
+              </a:rPr>
+              <a:t>解决方案</a:t>
+            </a:r>
+            <a:r>
+              <a:rPr lang="zh-CN" altLang="en-US" dirty="0">
+                <a:sym typeface="+mn-ea"/>
+              </a:rPr>
+              <a:t>：根据目前地框架，扩展一个生成倒叙</a:t>
+            </a:r>
+            <a:r>
+              <a:rPr lang="en-US" altLang="zh-CN" dirty="0">
+                <a:sym typeface="+mn-ea"/>
+              </a:rPr>
+              <a:t>cot</a:t>
+            </a:r>
+            <a:r>
+              <a:rPr lang="zh-CN" altLang="en-US" dirty="0">
+                <a:sym typeface="+mn-ea"/>
+              </a:rPr>
+              <a:t>的组件</a:t>
+            </a:r>
+            <a:endParaRPr lang="zh-CN" altLang="en-US" b="1" dirty="0">
+              <a:sym typeface="+mn-ea"/>
+            </a:endParaRPr>
+          </a:p>
+          <a:p>
+            <a:pPr>
+              <a:lnSpc>
+                <a:spcPct val="200000"/>
+              </a:lnSpc>
+            </a:pPr>
+            <a:r>
+              <a:rPr lang="zh-CN" altLang="en-US" b="1" dirty="0">
+                <a:sym typeface="+mn-ea"/>
+              </a:rPr>
+              <a:t>技术方案</a:t>
+            </a:r>
+            <a:r>
+              <a:rPr lang="zh-CN" altLang="en-US" dirty="0">
+                <a:sym typeface="+mn-ea"/>
+              </a:rPr>
+              <a:t>：类似于</a:t>
+            </a:r>
+            <a:r>
+              <a:rPr lang="en-US" altLang="zh-CN" dirty="0">
+                <a:sym typeface="+mn-ea"/>
+              </a:rPr>
+              <a:t>cot</a:t>
+            </a:r>
+            <a:r>
+              <a:rPr lang="zh-CN" altLang="en-US" dirty="0">
+                <a:sym typeface="+mn-ea"/>
+              </a:rPr>
+              <a:t>结构，做倒叙</a:t>
+            </a:r>
+            <a:r>
+              <a:rPr lang="zh-CN" altLang="en-US" dirty="0">
+                <a:sym typeface="+mn-ea"/>
+              </a:rPr>
+              <a:t>复现</a:t>
+            </a:r>
+            <a:endParaRPr lang="zh-CN" altLang="en-US" dirty="0">
+              <a:sym typeface="+mn-ea"/>
+            </a:endParaRPr>
+          </a:p>
+        </p:txBody>
+      </p:sp>
+      <p:pic>
+        <p:nvPicPr>
+          <p:cNvPr id="3" name="图片 2"/>
+          <p:cNvPicPr>
+            <a:picLocks noChangeAspect="1"/>
+          </p:cNvPicPr>
+          <p:nvPr/>
+        </p:nvPicPr>
+        <p:blipFill>
+          <a:blip r:embed="rId1"/>
+          <a:stretch>
+            <a:fillRect/>
+          </a:stretch>
+        </p:blipFill>
+        <p:spPr>
+          <a:xfrm>
+            <a:off x="479425" y="2439670"/>
+            <a:ext cx="10397490" cy="4281805"/>
+          </a:xfrm>
+          <a:prstGeom prst="rect">
+            <a:avLst/>
+          </a:prstGeom>
+        </p:spPr>
+      </p:pic>
+    </p:spTree>
+  </p:cSld>
+  <p:clrMapOvr>
+    <a:masterClrMapping/>
+  </p:clrMapOvr>
+</p:sld>
+</file>
+
+<file path=ppt/slides/slide19.xml><?xml version="1.0" encoding="utf-8"?>
+<p:sld xmlns:a="http://schemas.openxmlformats.org/drawingml/2006/main" xmlns:r="http://schemas.openxmlformats.org/officeDocument/2006/relationships" xmlns:p="http://schemas.openxmlformats.org/presentationml/2006/main">
+  <p:cSld>
+    <p:spTree>
+      <p:nvGrpSpPr>
+        <p:cNvPr id="1" name=""/>
+        <p:cNvGrpSpPr/>
+        <p:nvPr/>
+      </p:nvGrpSpPr>
+      <p:grpSpPr>
+        <a:xfrm>
+          <a:off x="0" y="0"/>
+          <a:ext cx="0" cy="0"/>
+          <a:chOff x="0" y="0"/>
+          <a:chExt cx="0" cy="0"/>
+        </a:xfrm>
+      </p:grpSpPr>
+      <p:sp>
+        <p:nvSpPr>
+          <p:cNvPr id="2" name="文本框 1"/>
+          <p:cNvSpPr txBox="1"/>
+          <p:nvPr/>
+        </p:nvSpPr>
+        <p:spPr>
+          <a:xfrm>
+            <a:off x="599090" y="302697"/>
+            <a:ext cx="5934710" cy="460375"/>
+          </a:xfrm>
+          <a:prstGeom prst="rect">
+            <a:avLst/>
+          </a:prstGeom>
+          <a:noFill/>
+        </p:spPr>
+        <p:txBody>
+          <a:bodyPr wrap="none" rtlCol="0">
+            <a:spAutoFit/>
+          </a:bodyPr>
+          <a:lstStyle/>
+          <a:p>
+            <a:pPr algn="l"/>
+            <a:r>
+              <a:rPr lang="zh-CN" altLang="en-US" sz="2400" dirty="0"/>
+              <a:t>四、进展</a:t>
+            </a:r>
+            <a:r>
+              <a:rPr lang="en-US" altLang="zh-CN" sz="2400" dirty="0"/>
+              <a:t>3</a:t>
+            </a:r>
+            <a:r>
+              <a:rPr lang="zh-CN" altLang="en-US" sz="2400" dirty="0"/>
+              <a:t>：</a:t>
+            </a:r>
+            <a:r>
+              <a:rPr lang="zh-CN" altLang="en-US" sz="2400" dirty="0">
+                <a:sym typeface="+mn-ea"/>
+              </a:rPr>
+              <a:t>正序和倒叙两种</a:t>
+            </a:r>
+            <a:r>
+              <a:rPr lang="en-US" altLang="zh-CN" sz="2400" dirty="0">
+                <a:sym typeface="+mn-ea"/>
+              </a:rPr>
+              <a:t>cot</a:t>
+            </a:r>
+            <a:r>
+              <a:rPr lang="zh-CN" altLang="en-US" sz="2400" dirty="0">
+                <a:sym typeface="+mn-ea"/>
+              </a:rPr>
+              <a:t>的生成</a:t>
+            </a:r>
+            <a:r>
+              <a:rPr lang="zh-CN" altLang="en-US" sz="2400" dirty="0">
+                <a:sym typeface="+mn-ea"/>
+              </a:rPr>
+              <a:t>机制</a:t>
+            </a:r>
+            <a:endParaRPr lang="zh-CN" altLang="en-US" sz="2400" dirty="0">
+              <a:sym typeface="+mn-ea"/>
+            </a:endParaRPr>
+          </a:p>
+        </p:txBody>
+      </p:sp>
+      <p:sp>
+        <p:nvSpPr>
+          <p:cNvPr id="5" name="文本框 4"/>
+          <p:cNvSpPr txBox="1"/>
+          <p:nvPr/>
+        </p:nvSpPr>
+        <p:spPr>
+          <a:xfrm>
+            <a:off x="513080" y="686435"/>
+            <a:ext cx="9208770" cy="5077460"/>
+          </a:xfrm>
+          <a:prstGeom prst="rect">
+            <a:avLst/>
+          </a:prstGeom>
+          <a:noFill/>
+        </p:spPr>
+        <p:txBody>
+          <a:bodyPr wrap="square" rtlCol="0" anchor="t">
+            <a:spAutoFit/>
+          </a:bodyPr>
+          <a:p>
+            <a:pPr>
+              <a:lnSpc>
+                <a:spcPct val="200000"/>
+              </a:lnSpc>
+            </a:pPr>
+            <a:r>
+              <a:rPr lang="zh-CN" altLang="en-US" b="1" dirty="0">
+                <a:sym typeface="+mn-ea"/>
+              </a:rPr>
+              <a:t>问题</a:t>
+            </a:r>
+            <a:r>
+              <a:rPr lang="zh-CN" altLang="en-US" dirty="0">
+                <a:sym typeface="+mn-ea"/>
+              </a:rPr>
+              <a:t>：原框架的</a:t>
+            </a:r>
+            <a:r>
+              <a:rPr lang="en-US" altLang="zh-CN" dirty="0">
+                <a:sym typeface="+mn-ea"/>
+              </a:rPr>
+              <a:t>cot</a:t>
+            </a:r>
+            <a:r>
+              <a:rPr lang="zh-CN" altLang="en-US" dirty="0">
+                <a:sym typeface="+mn-ea"/>
+              </a:rPr>
+              <a:t>仅仅有正序，在输出预测输入的评估集体系中表现</a:t>
+            </a:r>
+            <a:r>
+              <a:rPr lang="zh-CN" altLang="en-US" dirty="0">
+                <a:sym typeface="+mn-ea"/>
+              </a:rPr>
+              <a:t>一般</a:t>
+            </a:r>
+            <a:endParaRPr lang="zh-CN" altLang="en-US" dirty="0">
+              <a:sym typeface="+mn-ea"/>
+            </a:endParaRPr>
+          </a:p>
+          <a:p>
+            <a:pPr>
+              <a:lnSpc>
+                <a:spcPct val="200000"/>
+              </a:lnSpc>
+            </a:pPr>
+            <a:r>
+              <a:rPr lang="zh-CN" altLang="en-US" b="1" dirty="0">
+                <a:sym typeface="+mn-ea"/>
+              </a:rPr>
+              <a:t>解决方案</a:t>
+            </a:r>
+            <a:r>
+              <a:rPr lang="zh-CN" altLang="en-US" dirty="0">
+                <a:sym typeface="+mn-ea"/>
+              </a:rPr>
+              <a:t>：根据目前地框架，扩展一个生成倒叙</a:t>
+            </a:r>
+            <a:r>
+              <a:rPr lang="en-US" altLang="zh-CN" dirty="0">
+                <a:sym typeface="+mn-ea"/>
+              </a:rPr>
+              <a:t>cot</a:t>
+            </a:r>
+            <a:r>
+              <a:rPr lang="zh-CN" altLang="en-US" dirty="0">
+                <a:sym typeface="+mn-ea"/>
+              </a:rPr>
+              <a:t>的组件</a:t>
+            </a:r>
+            <a:endParaRPr lang="zh-CN" altLang="en-US" b="1" dirty="0">
+              <a:sym typeface="+mn-ea"/>
+            </a:endParaRPr>
+          </a:p>
+          <a:p>
+            <a:pPr>
+              <a:lnSpc>
+                <a:spcPct val="200000"/>
+              </a:lnSpc>
+            </a:pPr>
+            <a:r>
+              <a:rPr lang="zh-CN" altLang="en-US" b="1" dirty="0">
+                <a:sym typeface="+mn-ea"/>
+              </a:rPr>
+              <a:t>技术方案</a:t>
+            </a:r>
+            <a:r>
+              <a:rPr lang="zh-CN" altLang="en-US" dirty="0">
+                <a:sym typeface="+mn-ea"/>
+              </a:rPr>
+              <a:t>：类似于</a:t>
+            </a:r>
+            <a:r>
+              <a:rPr lang="en-US" altLang="zh-CN" dirty="0">
+                <a:sym typeface="+mn-ea"/>
+              </a:rPr>
+              <a:t>cot</a:t>
+            </a:r>
+            <a:r>
+              <a:rPr lang="zh-CN" altLang="en-US" dirty="0">
+                <a:sym typeface="+mn-ea"/>
+              </a:rPr>
+              <a:t>结构，做倒叙</a:t>
+            </a:r>
+            <a:r>
+              <a:rPr lang="zh-CN" altLang="en-US" dirty="0">
+                <a:sym typeface="+mn-ea"/>
+              </a:rPr>
+              <a:t>复现</a:t>
+            </a:r>
+            <a:endParaRPr lang="zh-CN" altLang="en-US" dirty="0">
+              <a:sym typeface="+mn-ea"/>
+            </a:endParaRPr>
+          </a:p>
+          <a:p>
+            <a:pPr>
+              <a:lnSpc>
+                <a:spcPct val="200000"/>
+              </a:lnSpc>
+            </a:pPr>
+            <a:endParaRPr lang="zh-CN" altLang="en-US" dirty="0">
+              <a:sym typeface="+mn-ea"/>
+            </a:endParaRPr>
+          </a:p>
+          <a:p>
+            <a:pPr>
+              <a:lnSpc>
+                <a:spcPct val="200000"/>
+              </a:lnSpc>
+            </a:pPr>
+            <a:r>
+              <a:rPr lang="en-US" altLang="zh-CN" dirty="0">
+                <a:sym typeface="+mn-ea"/>
+              </a:rPr>
+              <a:t>1. cot</a:t>
+            </a:r>
+            <a:r>
+              <a:rPr lang="zh-CN" altLang="en-US" dirty="0">
+                <a:sym typeface="+mn-ea"/>
+              </a:rPr>
+              <a:t>：第几行、补充解释的时候换行、解释</a:t>
+            </a:r>
+            <a:r>
+              <a:rPr lang="zh-CN" altLang="en-US" dirty="0">
+                <a:sym typeface="+mn-ea"/>
+              </a:rPr>
+              <a:t>更专业化</a:t>
+            </a:r>
+            <a:endParaRPr lang="zh-CN" altLang="en-US" dirty="0">
+              <a:sym typeface="+mn-ea"/>
+            </a:endParaRPr>
+          </a:p>
+          <a:p>
+            <a:pPr>
+              <a:lnSpc>
+                <a:spcPct val="200000"/>
+              </a:lnSpc>
+            </a:pPr>
+            <a:r>
+              <a:rPr lang="en-US" altLang="zh-CN" dirty="0">
+                <a:sym typeface="+mn-ea"/>
+              </a:rPr>
+              <a:t>2. </a:t>
+            </a:r>
+            <a:r>
+              <a:rPr lang="zh-CN" altLang="en-US" dirty="0">
+                <a:sym typeface="+mn-ea"/>
+              </a:rPr>
+              <a:t>对于过长循环进行处理和</a:t>
+            </a:r>
+            <a:r>
+              <a:rPr lang="zh-CN" altLang="en-US" dirty="0">
+                <a:sym typeface="+mn-ea"/>
+              </a:rPr>
+              <a:t>管理</a:t>
+            </a:r>
+            <a:endParaRPr lang="zh-CN" altLang="en-US" dirty="0">
+              <a:sym typeface="+mn-ea"/>
+            </a:endParaRPr>
+          </a:p>
+          <a:p>
+            <a:pPr>
+              <a:lnSpc>
+                <a:spcPct val="200000"/>
+              </a:lnSpc>
+            </a:pPr>
+            <a:r>
+              <a:rPr lang="en-US" altLang="zh-CN" dirty="0">
+                <a:sym typeface="+mn-ea"/>
+              </a:rPr>
+              <a:t>3. </a:t>
+            </a:r>
+            <a:r>
+              <a:rPr lang="zh-CN" altLang="en-US" dirty="0">
+                <a:sym typeface="+mn-ea"/>
+              </a:rPr>
+              <a:t>倒叙的思路：正序</a:t>
+            </a:r>
+            <a:r>
+              <a:rPr lang="en-US" altLang="zh-CN" dirty="0">
+                <a:sym typeface="+mn-ea"/>
+              </a:rPr>
+              <a:t>+</a:t>
+            </a:r>
+            <a:r>
+              <a:rPr lang="zh-CN" altLang="en-US" dirty="0">
+                <a:sym typeface="+mn-ea"/>
+              </a:rPr>
+              <a:t>大模型</a:t>
+            </a:r>
+            <a:r>
+              <a:rPr lang="en-US" altLang="zh-CN" dirty="0">
+                <a:sym typeface="+mn-ea"/>
+              </a:rPr>
+              <a:t>——&gt;</a:t>
+            </a:r>
+            <a:r>
+              <a:rPr lang="zh-CN" altLang="en-US" dirty="0">
+                <a:sym typeface="+mn-ea"/>
+              </a:rPr>
+              <a:t>可用的倒</a:t>
+            </a:r>
+            <a:r>
+              <a:rPr lang="zh-CN" altLang="en-US" dirty="0">
+                <a:sym typeface="+mn-ea"/>
+              </a:rPr>
+              <a:t>序</a:t>
+            </a:r>
+            <a:endParaRPr lang="zh-CN" altLang="en-US" dirty="0">
+              <a:sym typeface="+mn-ea"/>
+            </a:endParaRPr>
+          </a:p>
+          <a:p>
+            <a:pPr>
+              <a:lnSpc>
+                <a:spcPct val="200000"/>
+              </a:lnSpc>
+            </a:pPr>
+            <a:r>
+              <a:rPr lang="en-US" altLang="zh-CN" dirty="0">
+                <a:sym typeface="+mn-ea"/>
+              </a:rPr>
+              <a:t>4. s.a.b</a:t>
+            </a:r>
+            <a:r>
+              <a:rPr lang="zh-CN" altLang="en-US" dirty="0">
+                <a:sym typeface="+mn-ea"/>
+              </a:rPr>
+              <a:t>的逻辑进行深究与</a:t>
+            </a:r>
+            <a:r>
+              <a:rPr lang="zh-CN" altLang="en-US" dirty="0">
+                <a:sym typeface="+mn-ea"/>
+              </a:rPr>
+              <a:t>细化</a:t>
+            </a:r>
+            <a:endParaRPr lang="zh-CN" altLang="en-US" dirty="0">
+              <a:sym typeface="+mn-ea"/>
+            </a:endParaRPr>
+          </a:p>
+          <a:p>
+            <a:pPr>
+              <a:lnSpc>
+                <a:spcPct val="200000"/>
+              </a:lnSpc>
+            </a:pPr>
+            <a:r>
+              <a:rPr lang="en-US" altLang="zh-CN" dirty="0">
+                <a:sym typeface="+mn-ea"/>
+              </a:rPr>
+              <a:t>5. </a:t>
+            </a:r>
+            <a:r>
+              <a:rPr lang="zh-CN" altLang="en-US" dirty="0">
+                <a:sym typeface="+mn-ea"/>
+              </a:rPr>
+              <a:t>中英文</a:t>
+            </a:r>
+            <a:r>
+              <a:rPr lang="zh-CN" altLang="en-US" dirty="0">
+                <a:sym typeface="+mn-ea"/>
+              </a:rPr>
+              <a:t>转换</a:t>
+            </a:r>
+            <a:endParaRPr lang="zh-CN" altLang="en-US" dirty="0">
+              <a:sym typeface="+mn-ea"/>
+            </a:endParaRPr>
+          </a:p>
+        </p:txBody>
+      </p:sp>
+    </p:spTree>
   </p:cSld>
   <p:clrMapOvr>
     <a:masterClrMapping/>
@@ -5155,18 +6165,13 @@
               <a:rPr lang="zh-CN" altLang="en-US" sz="3200" dirty="0"/>
               <a:t>本周内容总结</a:t>
             </a:r>
+            <a:endParaRPr lang="zh-CN" altLang="en-US" sz="3200" dirty="0"/>
           </a:p>
         </p:txBody>
       </p:sp>
       <p:graphicFrame>
         <p:nvGraphicFramePr>
-          <p:cNvPr id="3" name="表格 2">
-            <a:extLst>
-              <a:ext uri="{FF2B5EF4-FFF2-40B4-BE49-F238E27FC236}">
-                <a16:creationId xmlns:a16="http://schemas.microsoft.com/office/drawing/2014/main" id="{1C6B85A2-ABAB-118A-93B8-6E28C76E348F}"/>
-              </a:ext>
-            </a:extLst>
-          </p:cNvPr>
+          <p:cNvPr id="3" name="表格 2"/>
           <p:cNvGraphicFramePr>
             <a:graphicFrameLocks noGrp="1"/>
           </p:cNvGraphicFramePr>
@@ -5174,16 +6179,11 @@
             <p:custDataLst>
               <p:tags r:id="rId1"/>
             </p:custDataLst>
-            <p:extLst>
-              <p:ext uri="{D42A27DB-BD31-4B8C-83A1-F6EECF244321}">
-                <p14:modId xmlns:p14="http://schemas.microsoft.com/office/powerpoint/2010/main" val="4130083583"/>
-              </p:ext>
-            </p:extLst>
           </p:nvPr>
         </p:nvGraphicFramePr>
         <p:xfrm>
-          <a:off x="190183" y="1090295"/>
-          <a:ext cx="11628438" cy="5668645"/>
+          <a:off x="190500" y="1090295"/>
+          <a:ext cx="11628755" cy="5537200"/>
         </p:xfrm>
         <a:graphic>
           <a:graphicData uri="http://schemas.openxmlformats.org/drawingml/2006/table">
@@ -5192,22 +6192,10 @@
                 <a:tableStyleId>{073A0DAA-6AF3-43AB-8588-CEC1D06C72B9}</a:tableStyleId>
               </a:tblPr>
               <a:tblGrid>
-                <a:gridCol w="1498028">
-                  <a:extLst>
-                    <a:ext uri="{9D8B030D-6E8A-4147-A177-3AD203B41FA5}">
-                      <a16:colId xmlns:a16="http://schemas.microsoft.com/office/drawing/2014/main" val="20000"/>
-                    </a:ext>
-                  </a:extLst>
-                </a:gridCol>
-                <a:gridCol w="10130410">
-                  <a:extLst>
-                    <a:ext uri="{9D8B030D-6E8A-4147-A177-3AD203B41FA5}">
-                      <a16:colId xmlns:a16="http://schemas.microsoft.com/office/drawing/2014/main" val="20001"/>
-                    </a:ext>
-                  </a:extLst>
-                </a:gridCol>
+                <a:gridCol w="1497965"/>
+                <a:gridCol w="10130790"/>
               </a:tblGrid>
-              <a:tr h="1702662">
+              <a:tr h="1606550">
                 <a:tc>
                   <a:txBody>
                     <a:bodyPr/>
@@ -5222,6 +6210,11 @@
                         </a:rPr>
                         <a:t>进展</a:t>
                       </a:r>
+                      <a:endParaRPr lang="zh-CN" altLang="en-US" sz="1600" b="0" dirty="0">
+                        <a:solidFill>
+                          <a:schemeClr val="tx1"/>
+                        </a:solidFill>
+                      </a:endParaRPr>
                     </a:p>
                   </a:txBody>
                   <a:tcPr anchor="ctr">
@@ -5333,6 +6326,133 @@
                         </a:rPr>
                         <a:t>这种情况）</a:t>
                       </a:r>
+                      <a:endParaRPr lang="zh-CN" altLang="en-US" sz="1600" b="0" dirty="0">
+                        <a:solidFill>
+                          <a:schemeClr val="tx1"/>
+                        </a:solidFill>
+                      </a:endParaRPr>
+                    </a:p>
+                    <a:p>
+                      <a:pPr marL="228600" indent="-228600" algn="l">
+                        <a:lnSpc>
+                          <a:spcPct val="150000"/>
+                        </a:lnSpc>
+                        <a:buAutoNum type="arabicPeriod"/>
+                      </a:pPr>
+                      <a:r>
+                        <a:rPr lang="zh-CN" altLang="en-US" sz="1600" b="0" dirty="0">
+                          <a:solidFill>
+                            <a:schemeClr val="tx1"/>
+                          </a:solidFill>
+                          <a:sym typeface="+mn-ea"/>
+                        </a:rPr>
+                        <a:t>做</a:t>
+                      </a:r>
+                      <a:r>
+                        <a:rPr lang="en-US" altLang="zh-CN" sz="1600" b="0" dirty="0">
+                          <a:solidFill>
+                            <a:schemeClr val="tx1"/>
+                          </a:solidFill>
+                          <a:sym typeface="+mn-ea"/>
+                        </a:rPr>
+                        <a:t>cot</a:t>
+                      </a:r>
+                      <a:r>
+                        <a:rPr lang="zh-CN" altLang="en-US" sz="1600" b="0" dirty="0">
+                          <a:solidFill>
+                            <a:schemeClr val="tx1"/>
+                          </a:solidFill>
+                          <a:sym typeface="+mn-ea"/>
+                        </a:rPr>
+                        <a:t>的简化和梳理</a:t>
+                      </a:r>
+                      <a:endParaRPr lang="zh-CN" altLang="en-US" sz="1600" b="0" dirty="0">
+                        <a:solidFill>
+                          <a:schemeClr val="tx1"/>
+                        </a:solidFill>
+                      </a:endParaRPr>
+                    </a:p>
+                    <a:p>
+                      <a:pPr marL="228600" indent="-228600" algn="l">
+                        <a:lnSpc>
+                          <a:spcPct val="150000"/>
+                        </a:lnSpc>
+                        <a:buAutoNum type="arabicPeriod"/>
+                      </a:pPr>
+                      <a:r>
+                        <a:rPr lang="zh-CN" altLang="en-US" sz="1600" b="0" dirty="0">
+                          <a:solidFill>
+                            <a:schemeClr val="tx1"/>
+                          </a:solidFill>
+                        </a:rPr>
+                        <a:t>产出</a:t>
+                      </a:r>
+                      <a:r>
+                        <a:rPr lang="zh-CN" altLang="en-US" sz="1600" b="0" dirty="0">
+                          <a:solidFill>
+                            <a:schemeClr val="tx1"/>
+                          </a:solidFill>
+                        </a:rPr>
+                        <a:t>了正序和倒叙两种</a:t>
+                      </a:r>
+                      <a:r>
+                        <a:rPr lang="en-US" altLang="zh-CN" sz="1600" b="0" dirty="0">
+                          <a:solidFill>
+                            <a:schemeClr val="tx1"/>
+                          </a:solidFill>
+                        </a:rPr>
+                        <a:t>cot</a:t>
+                      </a:r>
+                      <a:endParaRPr lang="en-US" altLang="zh-CN" sz="1600" b="0" dirty="0">
+                        <a:solidFill>
+                          <a:schemeClr val="tx1"/>
+                        </a:solidFill>
+                      </a:endParaRPr>
+                    </a:p>
+                    <a:p>
+                      <a:pPr marL="228600" indent="-228600" algn="l">
+                        <a:lnSpc>
+                          <a:spcPct val="150000"/>
+                        </a:lnSpc>
+                        <a:buAutoNum type="arabicPeriod"/>
+                      </a:pPr>
+                      <a:r>
+                        <a:rPr lang="zh-CN" altLang="en-US" sz="1600" b="0" dirty="0">
+                          <a:solidFill>
+                            <a:schemeClr val="tx1"/>
+                          </a:solidFill>
+                        </a:rPr>
+                        <a:t>总结来说基本完成</a:t>
+                      </a:r>
+                      <a:r>
+                        <a:rPr lang="en-US" altLang="zh-CN" sz="1600" b="0" dirty="0">
+                          <a:solidFill>
+                            <a:schemeClr val="tx1"/>
+                          </a:solidFill>
+                        </a:rPr>
+                        <a:t>cot</a:t>
+                      </a:r>
+                      <a:r>
+                        <a:rPr lang="zh-CN" altLang="en-US" sz="1600" b="0" dirty="0">
+                          <a:solidFill>
+                            <a:schemeClr val="tx1"/>
+                          </a:solidFill>
+                        </a:rPr>
+                        <a:t>生成框架细化，后续预期是边做数据集边发现问题进行</a:t>
+                      </a:r>
+                      <a:r>
+                        <a:rPr lang="zh-CN" altLang="en-US" sz="1600" b="0" dirty="0">
+                          <a:solidFill>
+                            <a:schemeClr val="tx1"/>
+                          </a:solidFill>
+                        </a:rPr>
+                        <a:t>调整</a:t>
+                      </a:r>
+                      <a:endParaRPr lang="zh-CN" altLang="en-US" sz="1600" b="0" dirty="0">
+                        <a:solidFill>
+                          <a:schemeClr val="tx1"/>
+                        </a:solidFill>
+                      </a:endParaRPr>
                     </a:p>
                   </a:txBody>
                   <a:tcPr anchor="ctr">
@@ -5385,13 +6505,8 @@
                     </a:solidFill>
                   </a:tcPr>
                 </a:tc>
-                <a:extLst>
-                  <a:ext uri="{0D108BD9-81ED-4DB2-BD59-A6C34878D82A}">
-                    <a16:rowId xmlns:a16="http://schemas.microsoft.com/office/drawing/2014/main" val="10000"/>
-                  </a:ext>
-                </a:extLst>
               </a:tr>
-              <a:tr h="1212583">
+              <a:tr h="1406525">
                 <a:tc>
                   <a:txBody>
                     <a:bodyPr/>
@@ -5406,6 +6521,11 @@
                         </a:rPr>
                         <a:t>Todo</a:t>
                       </a:r>
+                      <a:endParaRPr lang="en-US" altLang="zh-CN" sz="1600" b="0" dirty="0">
+                        <a:solidFill>
+                          <a:schemeClr val="tx1"/>
+                        </a:solidFill>
+                      </a:endParaRPr>
                     </a:p>
                   </a:txBody>
                   <a:tcPr anchor="ctr">
@@ -5463,12 +6583,158 @@
                     <a:bodyPr/>
                     <a:lstStyle/>
                     <a:p>
-                      <a:pPr marL="228600" indent="-228600" algn="l">
+                      <a:pPr indent="0" algn="l">
                         <a:lnSpc>
                           <a:spcPct val="150000"/>
                         </a:lnSpc>
-                        <a:buAutoNum type="arabicPeriod"/>
+                        <a:buNone/>
                       </a:pPr>
+                      <a:r>
+                        <a:rPr lang="en-US" altLang="zh-CN" sz="1600" b="0" dirty="0">
+                          <a:solidFill>
+                            <a:schemeClr val="tx1"/>
+                          </a:solidFill>
+                        </a:rPr>
+                        <a:t>1. </a:t>
+                      </a:r>
+                      <a:r>
+                        <a:rPr lang="zh-CN" altLang="en-US" sz="1600" b="0" dirty="0">
+                          <a:solidFill>
+                            <a:schemeClr val="tx1"/>
+                          </a:solidFill>
+                        </a:rPr>
+                        <a:t>讲目前地</a:t>
+                      </a:r>
+                      <a:r>
+                        <a:rPr lang="en-US" altLang="zh-CN" sz="1600" b="0" dirty="0">
+                          <a:solidFill>
+                            <a:schemeClr val="tx1"/>
+                          </a:solidFill>
+                        </a:rPr>
+                        <a:t>cot</a:t>
+                      </a:r>
+                      <a:r>
+                        <a:rPr lang="zh-CN" altLang="en-US" sz="1600" b="0" dirty="0">
+                          <a:solidFill>
+                            <a:schemeClr val="tx1"/>
+                          </a:solidFill>
+                        </a:rPr>
+                        <a:t>生成框架接入之前的案例扩展框架，产生新的</a:t>
+                      </a:r>
+                      <a:r>
+                        <a:rPr lang="zh-CN" altLang="en-US" sz="1600" b="0" dirty="0">
+                          <a:solidFill>
+                            <a:schemeClr val="tx1"/>
+                          </a:solidFill>
+                        </a:rPr>
+                        <a:t>技术框架</a:t>
+                      </a:r>
+                      <a:endParaRPr lang="zh-CN" altLang="en-US" sz="1600" b="0" dirty="0">
+                        <a:solidFill>
+                          <a:schemeClr val="tx1"/>
+                        </a:solidFill>
+                      </a:endParaRPr>
+                    </a:p>
+                    <a:p>
+                      <a:pPr indent="0" algn="l">
+                        <a:lnSpc>
+                          <a:spcPct val="150000"/>
+                        </a:lnSpc>
+                        <a:buNone/>
+                      </a:pPr>
+                      <a:r>
+                        <a:rPr lang="en-US" altLang="zh-CN" sz="1600" b="0" dirty="0">
+                          <a:solidFill>
+                            <a:schemeClr val="tx1"/>
+                          </a:solidFill>
+                        </a:rPr>
+                        <a:t>2. </a:t>
+                      </a:r>
+                      <a:r>
+                        <a:rPr lang="zh-CN" altLang="en-US" sz="1600" b="0" dirty="0">
+                          <a:solidFill>
+                            <a:schemeClr val="tx1"/>
+                          </a:solidFill>
+                        </a:rPr>
+                        <a:t>产出</a:t>
+                      </a:r>
+                      <a:r>
+                        <a:rPr lang="en-US" altLang="zh-CN" sz="1600" b="0" dirty="0">
+                          <a:solidFill>
+                            <a:schemeClr val="tx1"/>
+                          </a:solidFill>
+                        </a:rPr>
+                        <a:t>1000+</a:t>
+                      </a:r>
+                      <a:r>
+                        <a:rPr lang="zh-CN" altLang="en-US" sz="1600" b="0" dirty="0">
+                          <a:solidFill>
+                            <a:schemeClr val="tx1"/>
+                          </a:solidFill>
+                        </a:rPr>
+                        <a:t>合适质量的</a:t>
+                      </a:r>
+                      <a:r>
+                        <a:rPr lang="en-US" altLang="zh-CN" sz="1600" b="0" dirty="0">
+                          <a:solidFill>
+                            <a:schemeClr val="tx1"/>
+                          </a:solidFill>
+                        </a:rPr>
+                        <a:t>python</a:t>
+                      </a:r>
+                      <a:r>
+                        <a:rPr lang="zh-CN" altLang="en-US" sz="1600" b="0" dirty="0">
+                          <a:solidFill>
+                            <a:schemeClr val="tx1"/>
+                          </a:solidFill>
+                        </a:rPr>
+                        <a:t>数据集，投入微调流水线</a:t>
+                      </a:r>
+                      <a:r>
+                        <a:rPr lang="zh-CN" altLang="en-US" sz="1600" b="0" dirty="0">
+                          <a:solidFill>
+                            <a:schemeClr val="tx1"/>
+                          </a:solidFill>
+                        </a:rPr>
+                        <a:t>使用</a:t>
+                      </a:r>
+                      <a:endParaRPr lang="zh-CN" altLang="en-US" sz="1600" b="0" dirty="0">
+                        <a:solidFill>
+                          <a:schemeClr val="tx1"/>
+                        </a:solidFill>
+                      </a:endParaRPr>
+                    </a:p>
+                    <a:p>
+                      <a:pPr indent="0" algn="l">
+                        <a:lnSpc>
+                          <a:spcPct val="150000"/>
+                        </a:lnSpc>
+                        <a:buNone/>
+                      </a:pPr>
+                      <a:r>
+                        <a:rPr lang="en-US" altLang="zh-CN" sz="1600" b="0" dirty="0">
+                          <a:solidFill>
+                            <a:schemeClr val="tx1"/>
+                          </a:solidFill>
+                        </a:rPr>
+                        <a:t>3. </a:t>
+                      </a:r>
+                      <a:r>
+                        <a:rPr lang="zh-CN" altLang="en-US" sz="1600" b="0" dirty="0">
+                          <a:solidFill>
+                            <a:schemeClr val="tx1"/>
+                          </a:solidFill>
+                        </a:rPr>
+                        <a:t>依据定好的大作业文档需求，完成对应</a:t>
+                      </a:r>
+                      <a:r>
+                        <a:rPr lang="zh-CN" altLang="en-US" sz="1600" b="0" dirty="0">
+                          <a:solidFill>
+                            <a:schemeClr val="tx1"/>
+                          </a:solidFill>
+                        </a:rPr>
+                        <a:t>网站</a:t>
+                      </a:r>
                       <a:endParaRPr lang="zh-CN" altLang="en-US" sz="1600" b="0" dirty="0">
                         <a:solidFill>
                           <a:schemeClr val="tx1"/>
@@ -5526,13 +6792,8 @@
                     </a:solidFill>
                   </a:tcPr>
                 </a:tc>
-                <a:extLst>
-                  <a:ext uri="{0D108BD9-81ED-4DB2-BD59-A6C34878D82A}">
-                    <a16:rowId xmlns:a16="http://schemas.microsoft.com/office/drawing/2014/main" val="10002"/>
-                  </a:ext>
-                </a:extLst>
               </a:tr>
-              <a:tr h="2753400">
+              <a:tr h="2524125">
                 <a:tc>
                   <a:txBody>
                     <a:bodyPr/>
@@ -5547,6 +6808,11 @@
                         </a:rPr>
                         <a:t>会议纪要</a:t>
                       </a:r>
+                      <a:endParaRPr lang="zh-CN" altLang="en-US" sz="1600" b="0" dirty="0">
+                        <a:solidFill>
+                          <a:schemeClr val="tx1"/>
+                        </a:solidFill>
+                      </a:endParaRPr>
                     </a:p>
                   </a:txBody>
                   <a:tcPr anchor="ctr">
@@ -5690,11 +6956,6 @@
                     </a:solidFill>
                   </a:tcPr>
                 </a:tc>
-                <a:extLst>
-                  <a:ext uri="{0D108BD9-81ED-4DB2-BD59-A6C34878D82A}">
-                    <a16:rowId xmlns:a16="http://schemas.microsoft.com/office/drawing/2014/main" val="10003"/>
-                  </a:ext>
-                </a:extLst>
               </a:tr>
             </a:tbl>
           </a:graphicData>
@@ -5804,6 +7065,7 @@
                 <a:rPr lang="zh-CN" altLang="en-US" sz="1600"/>
                 <a:t>太粗糙简略</a:t>
               </a:r>
+              <a:endParaRPr lang="zh-CN" altLang="en-US" sz="1600"/>
             </a:p>
             <a:p>
               <a:pPr algn="ctr">
@@ -5815,6 +7077,7 @@
                 <a:rPr lang="zh-CN" altLang="en-US" sz="1600"/>
                 <a:t>对大模型提升弱</a:t>
               </a:r>
+              <a:endParaRPr lang="zh-CN" altLang="en-US" sz="1600"/>
             </a:p>
           </p:txBody>
         </p:sp>
@@ -5888,7 +7151,7 @@
               <p:cNvSpPr/>
               <p:nvPr>
                 <p:custDataLst>
-                  <p:tags r:id="rId11"/>
+                  <p:tags r:id="rId2"/>
                 </p:custDataLst>
               </p:nvPr>
             </p:nvSpPr>
@@ -5930,7 +7193,7 @@
               <p:cNvSpPr txBox="1"/>
               <p:nvPr>
                 <p:custDataLst>
-                  <p:tags r:id="rId12"/>
+                  <p:tags r:id="rId3"/>
                 </p:custDataLst>
               </p:nvPr>
             </p:nvSpPr>
@@ -5969,6 +7232,7 @@
                   <a:rPr lang="zh-CN" altLang="en-US" sz="1400" dirty="0"/>
                   <a:t>根据目前数据集，转换成可运行的代码并记录问题对应位置的运行结果</a:t>
                 </a:r>
+                <a:endParaRPr lang="zh-CN" altLang="en-US" sz="1400" dirty="0"/>
               </a:p>
             </p:txBody>
           </p:sp>
@@ -5979,7 +7243,7 @@
             <p:cNvGrpSpPr/>
             <p:nvPr>
               <p:custDataLst>
-                <p:tags r:id="rId2"/>
+                <p:tags r:id="rId4"/>
               </p:custDataLst>
             </p:nvPr>
           </p:nvGrpSpPr>
@@ -5997,7 +7261,7 @@
               <p:cNvSpPr/>
               <p:nvPr>
                 <p:custDataLst>
-                  <p:tags r:id="rId9"/>
+                  <p:tags r:id="rId5"/>
                 </p:custDataLst>
               </p:nvPr>
             </p:nvSpPr>
@@ -6044,7 +7308,7 @@
               <p:cNvSpPr txBox="1"/>
               <p:nvPr>
                 <p:custDataLst>
-                  <p:tags r:id="rId10"/>
+                  <p:tags r:id="rId6"/>
                 </p:custDataLst>
               </p:nvPr>
             </p:nvSpPr>
@@ -6111,6 +7375,11 @@
                   </a:rPr>
                   <a:t>cot</a:t>
                 </a:r>
+                <a:endParaRPr lang="en-US" altLang="zh-CN" sz="1400" b="1" strike="sngStrike" dirty="0">
+                  <a:solidFill>
+                    <a:srgbClr val="FF0000"/>
+                  </a:solidFill>
+                </a:endParaRPr>
               </a:p>
             </p:txBody>
           </p:sp>
@@ -6121,7 +7390,7 @@
             <p:cNvGrpSpPr/>
             <p:nvPr>
               <p:custDataLst>
-                <p:tags r:id="rId3"/>
+                <p:tags r:id="rId7"/>
               </p:custDataLst>
             </p:nvPr>
           </p:nvGrpSpPr>
@@ -6139,7 +7408,7 @@
               <p:cNvSpPr/>
               <p:nvPr>
                 <p:custDataLst>
-                  <p:tags r:id="rId7"/>
+                  <p:tags r:id="rId8"/>
                 </p:custDataLst>
               </p:nvPr>
             </p:nvSpPr>
@@ -6181,7 +7450,7 @@
               <p:cNvSpPr txBox="1"/>
               <p:nvPr>
                 <p:custDataLst>
-                  <p:tags r:id="rId8"/>
+                  <p:tags r:id="rId9"/>
                 </p:custDataLst>
               </p:nvPr>
             </p:nvSpPr>
@@ -6252,6 +7521,7 @@
                   <a:rPr lang="zh-CN" altLang="en-US" sz="1400" dirty="0"/>
                   <a:t>数目更新难度</a:t>
                 </a:r>
+                <a:endParaRPr lang="zh-CN" altLang="en-US" sz="1400" dirty="0"/>
               </a:p>
             </p:txBody>
           </p:sp>
@@ -6262,7 +7532,7 @@
             <p:cNvGrpSpPr/>
             <p:nvPr>
               <p:custDataLst>
-                <p:tags r:id="rId4"/>
+                <p:tags r:id="rId10"/>
               </p:custDataLst>
             </p:nvPr>
           </p:nvGrpSpPr>
@@ -6280,7 +7550,7 @@
               <p:cNvSpPr/>
               <p:nvPr>
                 <p:custDataLst>
-                  <p:tags r:id="rId5"/>
+                  <p:tags r:id="rId11"/>
                 </p:custDataLst>
               </p:nvPr>
             </p:nvSpPr>
@@ -6327,7 +7597,7 @@
               <p:cNvSpPr txBox="1"/>
               <p:nvPr>
                 <p:custDataLst>
-                  <p:tags r:id="rId6"/>
+                  <p:tags r:id="rId12"/>
                 </p:custDataLst>
               </p:nvPr>
             </p:nvSpPr>
@@ -6366,6 +7636,7 @@
                   <a:rPr lang="zh-CN" altLang="en-US" sz="1400" dirty="0"/>
                   <a:t>根据给出的背景和需求和已有数据集，扩展数据集</a:t>
                 </a:r>
+                <a:endParaRPr lang="zh-CN" altLang="en-US" sz="1400" dirty="0"/>
               </a:p>
             </p:txBody>
           </p:sp>
@@ -6446,6 +7717,7 @@
                 <a:rPr lang="zh-CN" altLang="en-US" sz="1400" dirty="0"/>
                 <a:t>的调用和流程把控</a:t>
               </a:r>
+              <a:endParaRPr lang="zh-CN" altLang="en-US" sz="1400" dirty="0"/>
             </a:p>
           </p:txBody>
         </p:sp>
@@ -6581,6 +7853,7 @@
                 <a:rPr lang="zh-CN" altLang="en-US" sz="1600"/>
                 <a:t>生成逻辑简略</a:t>
               </a:r>
+              <a:endParaRPr lang="zh-CN" altLang="en-US" sz="1600"/>
             </a:p>
             <a:p>
               <a:pPr algn="ctr">
@@ -6600,6 +7873,7 @@
                 <a:rPr lang="zh-CN" altLang="en-US" sz="1600"/>
                 <a:t>多样性低</a:t>
               </a:r>
+              <a:endParaRPr lang="zh-CN" altLang="en-US" sz="1600"/>
             </a:p>
           </p:txBody>
         </p:sp>
@@ -6684,6 +7958,9 @@
                 </a:rPr>
                 <a:t>生成逻辑</a:t>
               </a:r>
+              <a:endParaRPr lang="zh-CN" altLang="en-US" sz="1600" dirty="0">
+                <a:sym typeface="+mn-ea"/>
+              </a:endParaRPr>
             </a:p>
             <a:p>
               <a:r>
@@ -6710,6 +7987,9 @@
                 </a:rPr>
                 <a:t>cot</a:t>
               </a:r>
+              <a:endParaRPr lang="en-US" altLang="zh-CN" sz="1600" dirty="0">
+                <a:sym typeface="+mn-ea"/>
+              </a:endParaRPr>
             </a:p>
           </p:txBody>
         </p:sp>
@@ -6758,6 +8038,9 @@
                 </a:rPr>
                 <a:t>扩展生成逻辑调整，均衡难度和提升多样性</a:t>
               </a:r>
+              <a:endParaRPr lang="zh-CN" altLang="en-US" sz="1600" dirty="0">
+                <a:sym typeface="+mn-ea"/>
+              </a:endParaRPr>
             </a:p>
           </p:txBody>
         </p:sp>
@@ -6794,6 +8077,9 @@
                 </a:rPr>
                 <a:t>可视化工具集成</a:t>
               </a:r>
+              <a:endParaRPr lang="zh-CN" altLang="en-US" sz="1600" dirty="0">
+                <a:sym typeface="+mn-ea"/>
+              </a:endParaRPr>
             </a:p>
           </p:txBody>
         </p:sp>
@@ -6844,6 +8130,7 @@
               <a:rPr lang="zh-CN" altLang="en-US" sz="1400" dirty="0"/>
               <a:t>的真实代码</a:t>
             </a:r>
+            <a:endParaRPr lang="zh-CN" altLang="en-US" sz="1400" dirty="0"/>
           </a:p>
         </p:txBody>
       </p:sp>
@@ -6972,6 +8259,7 @@
               <a:rPr lang="zh-CN" altLang="en-US" sz="1400" dirty="0"/>
               <a:t>大混合</a:t>
             </a:r>
+            <a:endParaRPr lang="zh-CN" altLang="en-US" sz="1400" dirty="0"/>
           </a:p>
         </p:txBody>
       </p:sp>
@@ -7044,6 +8332,13 @@
               </a:rPr>
               <a:t>之前太简单了希望更难一点</a:t>
             </a:r>
+            <a:endParaRPr lang="zh-CN" altLang="en-US" sz="1600" dirty="0">
+              <a:solidFill>
+                <a:schemeClr val="bg1">
+                  <a:lumMod val="50000"/>
+                </a:schemeClr>
+              </a:solidFill>
+            </a:endParaRPr>
           </a:p>
         </p:txBody>
       </p:sp>
@@ -7151,6 +8446,7 @@
                 <a:rPr lang="zh-CN" altLang="en-US" sz="1600"/>
                 <a:t>太粗糙简略</a:t>
               </a:r>
+              <a:endParaRPr lang="zh-CN" altLang="en-US" sz="1600"/>
             </a:p>
             <a:p>
               <a:pPr algn="ctr">
@@ -7162,6 +8458,7 @@
                 <a:rPr lang="zh-CN" altLang="en-US" sz="1600"/>
                 <a:t>对大模型提升弱</a:t>
               </a:r>
+              <a:endParaRPr lang="zh-CN" altLang="en-US" sz="1600"/>
             </a:p>
           </p:txBody>
         </p:sp>
@@ -7235,7 +8532,7 @@
               <p:cNvSpPr/>
               <p:nvPr>
                 <p:custDataLst>
-                  <p:tags r:id="rId11"/>
+                  <p:tags r:id="rId2"/>
                 </p:custDataLst>
               </p:nvPr>
             </p:nvSpPr>
@@ -7277,7 +8574,7 @@
               <p:cNvSpPr txBox="1"/>
               <p:nvPr>
                 <p:custDataLst>
-                  <p:tags r:id="rId12"/>
+                  <p:tags r:id="rId3"/>
                 </p:custDataLst>
               </p:nvPr>
             </p:nvSpPr>
@@ -7316,6 +8613,7 @@
                   <a:rPr lang="zh-CN" altLang="en-US" sz="1400" dirty="0"/>
                   <a:t>根据目前数据集，转换成可运行的代码并记录问题对应位置的运行结果</a:t>
                 </a:r>
+                <a:endParaRPr lang="zh-CN" altLang="en-US" sz="1400" dirty="0"/>
               </a:p>
             </p:txBody>
           </p:sp>
@@ -7326,7 +8624,7 @@
             <p:cNvGrpSpPr/>
             <p:nvPr>
               <p:custDataLst>
-                <p:tags r:id="rId2"/>
+                <p:tags r:id="rId4"/>
               </p:custDataLst>
             </p:nvPr>
           </p:nvGrpSpPr>
@@ -7344,7 +8642,7 @@
               <p:cNvSpPr/>
               <p:nvPr>
                 <p:custDataLst>
-                  <p:tags r:id="rId9"/>
+                  <p:tags r:id="rId5"/>
                 </p:custDataLst>
               </p:nvPr>
             </p:nvSpPr>
@@ -7391,7 +8689,7 @@
               <p:cNvSpPr txBox="1"/>
               <p:nvPr>
                 <p:custDataLst>
-                  <p:tags r:id="rId10"/>
+                  <p:tags r:id="rId6"/>
                 </p:custDataLst>
               </p:nvPr>
             </p:nvSpPr>
@@ -7458,6 +8756,11 @@
                   </a:rPr>
                   <a:t>cot</a:t>
                 </a:r>
+                <a:endParaRPr lang="en-US" altLang="zh-CN" sz="1400" b="1" strike="sngStrike" dirty="0">
+                  <a:solidFill>
+                    <a:srgbClr val="FF0000"/>
+                  </a:solidFill>
+                </a:endParaRPr>
               </a:p>
             </p:txBody>
           </p:sp>
@@ -7468,7 +8771,7 @@
             <p:cNvGrpSpPr/>
             <p:nvPr>
               <p:custDataLst>
-                <p:tags r:id="rId3"/>
+                <p:tags r:id="rId7"/>
               </p:custDataLst>
             </p:nvPr>
           </p:nvGrpSpPr>
@@ -7486,7 +8789,7 @@
               <p:cNvSpPr/>
               <p:nvPr>
                 <p:custDataLst>
-                  <p:tags r:id="rId7"/>
+                  <p:tags r:id="rId8"/>
                 </p:custDataLst>
               </p:nvPr>
             </p:nvSpPr>
@@ -7528,7 +8831,7 @@
               <p:cNvSpPr txBox="1"/>
               <p:nvPr>
                 <p:custDataLst>
-                  <p:tags r:id="rId8"/>
+                  <p:tags r:id="rId9"/>
                 </p:custDataLst>
               </p:nvPr>
             </p:nvSpPr>
@@ -7599,6 +8902,7 @@
                   <a:rPr lang="zh-CN" altLang="en-US" sz="1400" dirty="0"/>
                   <a:t>数目更新难度</a:t>
                 </a:r>
+                <a:endParaRPr lang="zh-CN" altLang="en-US" sz="1400" dirty="0"/>
               </a:p>
             </p:txBody>
           </p:sp>
@@ -7609,7 +8913,7 @@
             <p:cNvGrpSpPr/>
             <p:nvPr>
               <p:custDataLst>
-                <p:tags r:id="rId4"/>
+                <p:tags r:id="rId10"/>
               </p:custDataLst>
             </p:nvPr>
           </p:nvGrpSpPr>
@@ -7627,7 +8931,7 @@
               <p:cNvSpPr/>
               <p:nvPr>
                 <p:custDataLst>
-                  <p:tags r:id="rId5"/>
+                  <p:tags r:id="rId11"/>
                 </p:custDataLst>
               </p:nvPr>
             </p:nvSpPr>
@@ -7674,7 +8978,7 @@
               <p:cNvSpPr txBox="1"/>
               <p:nvPr>
                 <p:custDataLst>
-                  <p:tags r:id="rId6"/>
+                  <p:tags r:id="rId12"/>
                 </p:custDataLst>
               </p:nvPr>
             </p:nvSpPr>
@@ -7713,6 +9017,7 @@
                   <a:rPr lang="zh-CN" altLang="en-US" sz="1400" dirty="0"/>
                   <a:t>根据给出的背景和需求和已有数据集，扩展数据集</a:t>
                 </a:r>
+                <a:endParaRPr lang="zh-CN" altLang="en-US" sz="1400" dirty="0"/>
               </a:p>
             </p:txBody>
           </p:sp>
@@ -7793,6 +9098,7 @@
                 <a:rPr lang="zh-CN" altLang="en-US" sz="1400" dirty="0"/>
                 <a:t>的调用和流程把控</a:t>
               </a:r>
+              <a:endParaRPr lang="zh-CN" altLang="en-US" sz="1400" dirty="0"/>
             </a:p>
           </p:txBody>
         </p:sp>
@@ -7928,6 +9234,7 @@
                 <a:rPr lang="zh-CN" altLang="en-US" sz="1600"/>
                 <a:t>生成逻辑简略</a:t>
               </a:r>
+              <a:endParaRPr lang="zh-CN" altLang="en-US" sz="1600"/>
             </a:p>
             <a:p>
               <a:pPr algn="ctr">
@@ -7947,6 +9254,7 @@
                 <a:rPr lang="zh-CN" altLang="en-US" sz="1600"/>
                 <a:t>多样性低</a:t>
               </a:r>
+              <a:endParaRPr lang="zh-CN" altLang="en-US" sz="1600"/>
             </a:p>
           </p:txBody>
         </p:sp>
@@ -8031,6 +9339,9 @@
                 </a:rPr>
                 <a:t>生成逻辑</a:t>
               </a:r>
+              <a:endParaRPr lang="zh-CN" altLang="en-US" sz="1600" dirty="0">
+                <a:sym typeface="+mn-ea"/>
+              </a:endParaRPr>
             </a:p>
             <a:p>
               <a:r>
@@ -8057,6 +9368,9 @@
                 </a:rPr>
                 <a:t>cot</a:t>
               </a:r>
+              <a:endParaRPr lang="en-US" altLang="zh-CN" sz="1600" dirty="0">
+                <a:sym typeface="+mn-ea"/>
+              </a:endParaRPr>
             </a:p>
           </p:txBody>
         </p:sp>
@@ -8105,6 +9419,9 @@
                 </a:rPr>
                 <a:t>扩展生成逻辑调整，均衡难度和提升多样性</a:t>
               </a:r>
+              <a:endParaRPr lang="zh-CN" altLang="en-US" sz="1600" dirty="0">
+                <a:sym typeface="+mn-ea"/>
+              </a:endParaRPr>
             </a:p>
           </p:txBody>
         </p:sp>
@@ -8141,6 +9458,9 @@
                 </a:rPr>
                 <a:t>可视化工具集成</a:t>
               </a:r>
+              <a:endParaRPr lang="zh-CN" altLang="en-US" sz="1600" dirty="0">
+                <a:sym typeface="+mn-ea"/>
+              </a:endParaRPr>
             </a:p>
           </p:txBody>
         </p:sp>
@@ -8191,6 +9511,7 @@
               <a:rPr lang="zh-CN" altLang="en-US" sz="1400" dirty="0"/>
               <a:t>的真实代码</a:t>
             </a:r>
+            <a:endParaRPr lang="zh-CN" altLang="en-US" sz="1400" dirty="0"/>
           </a:p>
         </p:txBody>
       </p:sp>
@@ -8319,6 +9640,7 @@
               <a:rPr lang="zh-CN" altLang="en-US" sz="1400" dirty="0"/>
               <a:t>大混合</a:t>
             </a:r>
+            <a:endParaRPr lang="zh-CN" altLang="en-US" sz="1400" dirty="0"/>
           </a:p>
         </p:txBody>
       </p:sp>
@@ -8391,6 +9713,13 @@
               </a:rPr>
               <a:t>之前太简单了希望更难一点</a:t>
             </a:r>
+            <a:endParaRPr lang="zh-CN" altLang="en-US" sz="1600" dirty="0">
+              <a:solidFill>
+                <a:schemeClr val="bg1">
+                  <a:lumMod val="50000"/>
+                </a:schemeClr>
+              </a:solidFill>
+            </a:endParaRPr>
           </a:p>
         </p:txBody>
       </p:sp>
@@ -8403,10 +9732,10 @@
           <p:nvPr/>
         </p:nvPicPr>
         <p:blipFill>
-          <a:blip r:embed="rId14">
+          <a:blip r:embed="rId13">
             <a:extLst>
               <a:ext uri="{96DAC541-7B7A-43D3-8B79-37D633B846F1}">
-                <asvg:svgBlip xmlns:asvg="http://schemas.microsoft.com/office/drawing/2016/SVG/main" r:embed="rId15"/>
+                <asvg:svgBlip xmlns:asvg="http://schemas.microsoft.com/office/drawing/2016/SVG/main" r:embed="rId14"/>
               </a:ext>
             </a:extLst>
           </a:blip>
@@ -8450,6 +9779,7 @@
               <a:rPr lang="zh-CN" altLang="en-US" sz="2000"/>
               <a:t>体验不错，后续待优化</a:t>
             </a:r>
+            <a:endParaRPr lang="zh-CN" altLang="en-US" sz="2000"/>
           </a:p>
         </p:txBody>
       </p:sp>
@@ -8494,6 +9824,7 @@
               <a:rPr lang="zh-CN" altLang="en-US" sz="2000"/>
               <a:t>数据</a:t>
             </a:r>
+            <a:endParaRPr lang="zh-CN" altLang="en-US" sz="2000"/>
           </a:p>
           <a:p>
             <a:r>
@@ -8512,6 +9843,7 @@
               <a:rPr lang="en-US" altLang="zh-CN" sz="2000"/>
               <a:t>cot</a:t>
             </a:r>
+            <a:endParaRPr lang="en-US" altLang="zh-CN" sz="2000"/>
           </a:p>
         </p:txBody>
       </p:sp>
@@ -8541,6 +9873,7 @@
               <a:rPr lang="zh-CN" altLang="en-US" sz="2000"/>
               <a:t>已完善</a:t>
             </a:r>
+            <a:endParaRPr lang="zh-CN" altLang="en-US" sz="2000"/>
           </a:p>
         </p:txBody>
       </p:sp>
@@ -8553,10 +9886,10 @@
           <p:nvPr/>
         </p:nvPicPr>
         <p:blipFill>
-          <a:blip r:embed="rId14">
+          <a:blip r:embed="rId13">
             <a:extLst>
               <a:ext uri="{96DAC541-7B7A-43D3-8B79-37D633B846F1}">
-                <asvg:svgBlip xmlns:asvg="http://schemas.microsoft.com/office/drawing/2016/SVG/main" r:embed="rId15"/>
+                <asvg:svgBlip xmlns:asvg="http://schemas.microsoft.com/office/drawing/2016/SVG/main" r:embed="rId14"/>
               </a:ext>
             </a:extLst>
           </a:blip>
@@ -8583,10 +9916,10 @@
           <p:nvPr/>
         </p:nvPicPr>
         <p:blipFill>
-          <a:blip r:embed="rId14">
+          <a:blip r:embed="rId13">
             <a:extLst>
               <a:ext uri="{96DAC541-7B7A-43D3-8B79-37D633B846F1}">
-                <asvg:svgBlip xmlns:asvg="http://schemas.microsoft.com/office/drawing/2016/SVG/main" r:embed="rId15"/>
+                <asvg:svgBlip xmlns:asvg="http://schemas.microsoft.com/office/drawing/2016/SVG/main" r:embed="rId14"/>
               </a:ext>
             </a:extLst>
           </a:blip>
@@ -8613,10 +9946,10 @@
           <p:nvPr/>
         </p:nvPicPr>
         <p:blipFill>
-          <a:blip r:embed="rId16">
+          <a:blip r:embed="rId15">
             <a:extLst>
               <a:ext uri="{96DAC541-7B7A-43D3-8B79-37D633B846F1}">
-                <asvg:svgBlip xmlns:asvg="http://schemas.microsoft.com/office/drawing/2016/SVG/main" r:embed="rId17"/>
+                <asvg:svgBlip xmlns:asvg="http://schemas.microsoft.com/office/drawing/2016/SVG/main" r:embed="rId16"/>
               </a:ext>
             </a:extLst>
           </a:blip>
@@ -8783,6 +10116,9 @@
               </a:rPr>
               <a:t>生成逻辑：</a:t>
             </a:r>
+            <a:endParaRPr lang="zh-CN" altLang="en-US" sz="2000">
+              <a:sym typeface="+mn-ea"/>
+            </a:endParaRPr>
           </a:p>
           <a:p>
             <a:pPr indent="457200">
@@ -8802,6 +10138,9 @@
               </a:rPr>
               <a:t>代码执行追踪</a:t>
             </a:r>
+            <a:endParaRPr lang="zh-CN" altLang="en-US" sz="2000">
+              <a:sym typeface="+mn-ea"/>
+            </a:endParaRPr>
           </a:p>
           <a:p>
             <a:pPr indent="457200">
@@ -8821,6 +10160,9 @@
               </a:rPr>
               <a:t>智能回溯与剪枝</a:t>
             </a:r>
+            <a:endParaRPr lang="zh-CN" altLang="en-US" sz="2000">
+              <a:sym typeface="+mn-ea"/>
+            </a:endParaRPr>
           </a:p>
           <a:p>
             <a:pPr indent="457200">
@@ -8852,6 +10194,9 @@
               </a:rPr>
               <a:t>生成</a:t>
             </a:r>
+            <a:endParaRPr lang="zh-CN" altLang="en-US" sz="2000">
+              <a:sym typeface="+mn-ea"/>
+            </a:endParaRPr>
           </a:p>
           <a:p>
             <a:pPr>
@@ -8886,28 +10231,28 @@
               </a:rPr>
               <a:t>依赖，保证结果的可控性与高质量</a:t>
             </a:r>
+            <a:endParaRPr lang="zh-CN" altLang="en-US" sz="2000" b="1">
+              <a:solidFill>
+                <a:srgbClr val="FF0000"/>
+              </a:solidFill>
+              <a:sym typeface="+mn-ea"/>
+            </a:endParaRPr>
           </a:p>
         </p:txBody>
       </p:sp>
       <p:pic>
         <p:nvPicPr>
-          <p:cNvPr id="3" name="图片 7" descr="向右箭头">
-            <a:extLst>
-              <a:ext uri="{FF2B5EF4-FFF2-40B4-BE49-F238E27FC236}">
-                <a16:creationId xmlns:a16="http://schemas.microsoft.com/office/drawing/2014/main" id="{79A3EBEA-A2E5-524E-A55E-88D1D754A27B}"/>
-              </a:ext>
-            </a:extLst>
-          </p:cNvPr>
+          <p:cNvPr id="3" name="图片 7" descr="向右箭头"/>
           <p:cNvPicPr>
             <a:picLocks noChangeAspect="1"/>
           </p:cNvPicPr>
           <p:nvPr/>
         </p:nvPicPr>
         <p:blipFill>
-          <a:blip r:embed="rId2">
+          <a:blip r:embed="rId1">
             <a:extLst>
               <a:ext uri="{96DAC541-7B7A-43D3-8B79-37D633B846F1}">
-                <asvg:svgBlip xmlns:asvg="http://schemas.microsoft.com/office/drawing/2016/SVG/main" r:embed="rId3"/>
+                <asvg:svgBlip xmlns:asvg="http://schemas.microsoft.com/office/drawing/2016/SVG/main" r:embed="rId2"/>
               </a:ext>
             </a:extLst>
           </a:blip>
@@ -8927,13 +10272,7 @@
       </p:pic>
       <p:sp>
         <p:nvSpPr>
-          <p:cNvPr id="4" name="文本框 3">
-            <a:extLst>
-              <a:ext uri="{FF2B5EF4-FFF2-40B4-BE49-F238E27FC236}">
-                <a16:creationId xmlns:a16="http://schemas.microsoft.com/office/drawing/2014/main" id="{53A91586-2819-24EA-AF3C-2CD64F23018C}"/>
-              </a:ext>
-            </a:extLst>
-          </p:cNvPr>
+          <p:cNvPr id="4" name="文本框 3"/>
           <p:cNvSpPr txBox="1"/>
           <p:nvPr/>
         </p:nvSpPr>
@@ -9026,6 +10365,9 @@
               </a:rPr>
               <a:t>cot</a:t>
             </a:r>
+            <a:endParaRPr lang="en-US" altLang="zh-CN" sz="2000" dirty="0">
+              <a:sym typeface="+mn-ea"/>
+            </a:endParaRPr>
           </a:p>
           <a:p>
             <a:pPr>
@@ -9057,6 +10399,9 @@
               </a:rPr>
               <a:t>的简化和梳理</a:t>
             </a:r>
+            <a:endParaRPr lang="zh-CN" altLang="en-US" sz="2000" dirty="0">
+              <a:sym typeface="+mn-ea"/>
+            </a:endParaRPr>
           </a:p>
         </p:txBody>
       </p:sp>
@@ -9143,13 +10488,7 @@
       </p:sp>
       <p:sp>
         <p:nvSpPr>
-          <p:cNvPr id="4" name="文本框 3">
-            <a:extLst>
-              <a:ext uri="{FF2B5EF4-FFF2-40B4-BE49-F238E27FC236}">
-                <a16:creationId xmlns:a16="http://schemas.microsoft.com/office/drawing/2014/main" id="{8FCC2A03-2335-FE72-6AA5-9274954855B5}"/>
-              </a:ext>
-            </a:extLst>
-          </p:cNvPr>
+          <p:cNvPr id="4" name="文本框 3"/>
           <p:cNvSpPr txBox="1"/>
           <p:nvPr/>
         </p:nvSpPr>
@@ -9325,11 +10664,6 @@
         </p:txBody>
       </p:sp>
     </p:spTree>
-    <p:extLst>
-      <p:ext uri="{BB962C8B-B14F-4D97-AF65-F5344CB8AC3E}">
-        <p14:creationId xmlns:p14="http://schemas.microsoft.com/office/powerpoint/2010/main" val="145550425"/>
-      </p:ext>
-    </p:extLst>
   </p:cSld>
   <p:clrMapOvr>
     <a:masterClrMapping/>
@@ -9412,13 +10746,7 @@
       </p:sp>
       <p:sp>
         <p:nvSpPr>
-          <p:cNvPr id="4" name="文本框 3">
-            <a:extLst>
-              <a:ext uri="{FF2B5EF4-FFF2-40B4-BE49-F238E27FC236}">
-                <a16:creationId xmlns:a16="http://schemas.microsoft.com/office/drawing/2014/main" id="{8FCC2A03-2335-FE72-6AA5-9274954855B5}"/>
-              </a:ext>
-            </a:extLst>
-          </p:cNvPr>
+          <p:cNvPr id="4" name="文本框 3"/>
           <p:cNvSpPr txBox="1"/>
           <p:nvPr/>
         </p:nvSpPr>
@@ -9552,11 +10880,6 @@
         </p:txBody>
       </p:sp>
     </p:spTree>
-    <p:extLst>
-      <p:ext uri="{BB962C8B-B14F-4D97-AF65-F5344CB8AC3E}">
-        <p14:creationId xmlns:p14="http://schemas.microsoft.com/office/powerpoint/2010/main" val="3114728741"/>
-      </p:ext>
-    </p:extLst>
   </p:cSld>
   <p:clrMapOvr>
     <a:masterClrMapping/>
@@ -9639,13 +10962,7 @@
       </p:sp>
       <p:sp>
         <p:nvSpPr>
-          <p:cNvPr id="4" name="文本框 3">
-            <a:extLst>
-              <a:ext uri="{FF2B5EF4-FFF2-40B4-BE49-F238E27FC236}">
-                <a16:creationId xmlns:a16="http://schemas.microsoft.com/office/drawing/2014/main" id="{8FCC2A03-2335-FE72-6AA5-9274954855B5}"/>
-              </a:ext>
-            </a:extLst>
-          </p:cNvPr>
+          <p:cNvPr id="4" name="文本框 3"/>
           <p:cNvSpPr txBox="1"/>
           <p:nvPr/>
         </p:nvSpPr>
@@ -9770,6 +11087,7 @@
               <a:rPr lang="en-US" altLang="zh-CN" dirty="0"/>
               <a:t>score.math</a:t>
             </a:r>
+            <a:endParaRPr lang="en-US" altLang="zh-CN" dirty="0"/>
           </a:p>
           <a:p>
             <a:pPr>
@@ -9834,11 +11152,6 @@
         </p:txBody>
       </p:sp>
     </p:spTree>
-    <p:extLst>
-      <p:ext uri="{BB962C8B-B14F-4D97-AF65-F5344CB8AC3E}">
-        <p14:creationId xmlns:p14="http://schemas.microsoft.com/office/powerpoint/2010/main" val="2036687981"/>
-      </p:ext>
-    </p:extLst>
   </p:cSld>
   <p:clrMapOvr>
     <a:masterClrMapping/>
@@ -9921,13 +11234,7 @@
       </p:sp>
       <p:sp>
         <p:nvSpPr>
-          <p:cNvPr id="4" name="文本框 3">
-            <a:extLst>
-              <a:ext uri="{FF2B5EF4-FFF2-40B4-BE49-F238E27FC236}">
-                <a16:creationId xmlns:a16="http://schemas.microsoft.com/office/drawing/2014/main" id="{8FCC2A03-2335-FE72-6AA5-9274954855B5}"/>
-              </a:ext>
-            </a:extLst>
-          </p:cNvPr>
+          <p:cNvPr id="4" name="文本框 3"/>
           <p:cNvSpPr txBox="1"/>
           <p:nvPr/>
         </p:nvSpPr>
@@ -9998,20 +11305,14 @@
       </p:sp>
       <p:pic>
         <p:nvPicPr>
-          <p:cNvPr id="5" name="图片 4">
-            <a:extLst>
-              <a:ext uri="{FF2B5EF4-FFF2-40B4-BE49-F238E27FC236}">
-                <a16:creationId xmlns:a16="http://schemas.microsoft.com/office/drawing/2014/main" id="{068FFEEE-2F34-7DC9-896C-FB3CD211D4EC}"/>
-              </a:ext>
-            </a:extLst>
-          </p:cNvPr>
+          <p:cNvPr id="5" name="图片 4"/>
           <p:cNvPicPr>
             <a:picLocks noChangeAspect="1"/>
           </p:cNvPicPr>
           <p:nvPr/>
         </p:nvPicPr>
         <p:blipFill>
-          <a:blip r:embed="rId2"/>
+          <a:blip r:embed="rId1"/>
           <a:stretch>
             <a:fillRect/>
           </a:stretch>
@@ -10027,11 +11328,6 @@
         </p:spPr>
       </p:pic>
     </p:spTree>
-    <p:extLst>
-      <p:ext uri="{BB962C8B-B14F-4D97-AF65-F5344CB8AC3E}">
-        <p14:creationId xmlns:p14="http://schemas.microsoft.com/office/powerpoint/2010/main" val="1480806164"/>
-      </p:ext>
-    </p:extLst>
   </p:cSld>
   <p:clrMapOvr>
     <a:masterClrMapping/>
@@ -10040,158 +11336,158 @@
 </file>
 
 <file path=ppt/tags/tag1.xml><?xml version="1.0" encoding="utf-8"?>
-<p:tagLst xmlns:a="http://schemas.openxmlformats.org/drawingml/2006/main" xmlns:r="http://schemas.openxmlformats.org/officeDocument/2006/relationships" xmlns:p="http://schemas.openxmlformats.org/presentationml/2006/main">
-  <p:tag name="RESOURCE_RECORD_KEY" val="{&quot;10&quot;:[20179637,20211662,50039266,21564682]}"/>
+<p:tagLst xmlns:p="http://schemas.openxmlformats.org/presentationml/2006/main">
+  <p:tag name="TABLE_ENDDRAG_ORIGIN_RECT" val="915*418"/>
+  <p:tag name="TABLE_ENDDRAG_RECT" val="15*85*915*418"/>
 </p:tagLst>
 </file>
 
 <file path=ppt/tags/tag10.xml><?xml version="1.0" encoding="utf-8"?>
-<p:tagLst xmlns:a="http://schemas.openxmlformats.org/drawingml/2006/main" xmlns:r="http://schemas.openxmlformats.org/officeDocument/2006/relationships" xmlns:p="http://schemas.openxmlformats.org/presentationml/2006/main">
+<p:tagLst xmlns:p="http://schemas.openxmlformats.org/presentationml/2006/main">
   <p:tag name="KSO_WM_DIAGRAM_VIRTUALLY_FRAME" val="{&quot;height&quot;:295.45,&quot;left&quot;:193.97795275590542,&quot;top&quot;:124.7,&quot;width&quot;:304.8220472440945}"/>
 </p:tagLst>
 </file>
 
 <file path=ppt/tags/tag11.xml><?xml version="1.0" encoding="utf-8"?>
-<p:tagLst xmlns:a="http://schemas.openxmlformats.org/drawingml/2006/main" xmlns:r="http://schemas.openxmlformats.org/officeDocument/2006/relationships" xmlns:p="http://schemas.openxmlformats.org/presentationml/2006/main">
+<p:tagLst xmlns:p="http://schemas.openxmlformats.org/presentationml/2006/main">
   <p:tag name="KSO_WM_DIAGRAM_VIRTUALLY_FRAME" val="{&quot;height&quot;:295.45,&quot;left&quot;:193.97795275590542,&quot;top&quot;:124.7,&quot;width&quot;:304.8220472440945}"/>
 </p:tagLst>
 </file>
 
 <file path=ppt/tags/tag12.xml><?xml version="1.0" encoding="utf-8"?>
-<p:tagLst xmlns:a="http://schemas.openxmlformats.org/drawingml/2006/main" xmlns:r="http://schemas.openxmlformats.org/officeDocument/2006/relationships" xmlns:p="http://schemas.openxmlformats.org/presentationml/2006/main">
+<p:tagLst xmlns:p="http://schemas.openxmlformats.org/presentationml/2006/main">
   <p:tag name="KSO_WM_DIAGRAM_VIRTUALLY_FRAME" val="{&quot;height&quot;:295.45,&quot;left&quot;:193.97795275590542,&quot;top&quot;:124.7,&quot;width&quot;:304.8220472440945}"/>
 </p:tagLst>
 </file>
 
 <file path=ppt/tags/tag13.xml><?xml version="1.0" encoding="utf-8"?>
-<p:tagLst xmlns:a="http://schemas.openxmlformats.org/drawingml/2006/main" xmlns:r="http://schemas.openxmlformats.org/officeDocument/2006/relationships" xmlns:p="http://schemas.openxmlformats.org/presentationml/2006/main">
+<p:tagLst xmlns:p="http://schemas.openxmlformats.org/presentationml/2006/main">
   <p:tag name="KSO_WM_DIAGRAM_VIRTUALLY_FRAME" val="{&quot;height&quot;:295.45,&quot;left&quot;:193.97795275590542,&quot;top&quot;:124.7,&quot;width&quot;:304.8220472440945}"/>
 </p:tagLst>
 </file>
 
 <file path=ppt/tags/tag14.xml><?xml version="1.0" encoding="utf-8"?>
-<p:tagLst xmlns:a="http://schemas.openxmlformats.org/drawingml/2006/main" xmlns:r="http://schemas.openxmlformats.org/officeDocument/2006/relationships" xmlns:p="http://schemas.openxmlformats.org/presentationml/2006/main">
+<p:tagLst xmlns:p="http://schemas.openxmlformats.org/presentationml/2006/main">
   <p:tag name="KSO_WM_DIAGRAM_VIRTUALLY_FRAME" val="{&quot;height&quot;:295.45,&quot;left&quot;:193.97795275590542,&quot;top&quot;:124.7,&quot;width&quot;:304.8220472440945}"/>
 </p:tagLst>
 </file>
 
 <file path=ppt/tags/tag15.xml><?xml version="1.0" encoding="utf-8"?>
-<p:tagLst xmlns:a="http://schemas.openxmlformats.org/drawingml/2006/main" xmlns:r="http://schemas.openxmlformats.org/officeDocument/2006/relationships" xmlns:p="http://schemas.openxmlformats.org/presentationml/2006/main">
+<p:tagLst xmlns:p="http://schemas.openxmlformats.org/presentationml/2006/main">
   <p:tag name="KSO_WM_DIAGRAM_VIRTUALLY_FRAME" val="{&quot;height&quot;:295.45,&quot;left&quot;:193.97795275590542,&quot;top&quot;:124.7,&quot;width&quot;:304.8220472440945}"/>
 </p:tagLst>
 </file>
 
 <file path=ppt/tags/tag16.xml><?xml version="1.0" encoding="utf-8"?>
-<p:tagLst xmlns:a="http://schemas.openxmlformats.org/drawingml/2006/main" xmlns:r="http://schemas.openxmlformats.org/officeDocument/2006/relationships" xmlns:p="http://schemas.openxmlformats.org/presentationml/2006/main">
+<p:tagLst xmlns:p="http://schemas.openxmlformats.org/presentationml/2006/main">
   <p:tag name="KSO_WM_DIAGRAM_VIRTUALLY_FRAME" val="{&quot;height&quot;:295.45,&quot;left&quot;:193.97795275590542,&quot;top&quot;:124.7,&quot;width&quot;:304.8220472440945}"/>
 </p:tagLst>
 </file>
 
 <file path=ppt/tags/tag17.xml><?xml version="1.0" encoding="utf-8"?>
-<p:tagLst xmlns:a="http://schemas.openxmlformats.org/drawingml/2006/main" xmlns:r="http://schemas.openxmlformats.org/officeDocument/2006/relationships" xmlns:p="http://schemas.openxmlformats.org/presentationml/2006/main">
+<p:tagLst xmlns:p="http://schemas.openxmlformats.org/presentationml/2006/main">
   <p:tag name="KSO_WM_DIAGRAM_VIRTUALLY_FRAME" val="{&quot;height&quot;:295.45,&quot;left&quot;:193.97795275590542,&quot;top&quot;:124.7,&quot;width&quot;:304.8220472440945}"/>
 </p:tagLst>
 </file>
 
 <file path=ppt/tags/tag18.xml><?xml version="1.0" encoding="utf-8"?>
-<p:tagLst xmlns:a="http://schemas.openxmlformats.org/drawingml/2006/main" xmlns:r="http://schemas.openxmlformats.org/officeDocument/2006/relationships" xmlns:p="http://schemas.openxmlformats.org/presentationml/2006/main">
+<p:tagLst xmlns:p="http://schemas.openxmlformats.org/presentationml/2006/main">
   <p:tag name="KSO_WM_DIAGRAM_VIRTUALLY_FRAME" val="{&quot;height&quot;:295.45,&quot;left&quot;:193.97795275590542,&quot;top&quot;:124.7,&quot;width&quot;:304.8220472440945}"/>
 </p:tagLst>
 </file>
 
 <file path=ppt/tags/tag19.xml><?xml version="1.0" encoding="utf-8"?>
-<p:tagLst xmlns:a="http://schemas.openxmlformats.org/drawingml/2006/main" xmlns:r="http://schemas.openxmlformats.org/officeDocument/2006/relationships" xmlns:p="http://schemas.openxmlformats.org/presentationml/2006/main">
+<p:tagLst xmlns:p="http://schemas.openxmlformats.org/presentationml/2006/main">
   <p:tag name="KSO_WM_DIAGRAM_VIRTUALLY_FRAME" val="{&quot;height&quot;:295.45,&quot;left&quot;:193.97795275590542,&quot;top&quot;:124.7,&quot;width&quot;:304.8220472440945}"/>
 </p:tagLst>
 </file>
 
 <file path=ppt/tags/tag2.xml><?xml version="1.0" encoding="utf-8"?>
-<p:tagLst xmlns:a="http://schemas.openxmlformats.org/drawingml/2006/main" xmlns:r="http://schemas.openxmlformats.org/officeDocument/2006/relationships" xmlns:p="http://schemas.openxmlformats.org/presentationml/2006/main">
-  <p:tag name="TABLE_ENDDRAG_ORIGIN_RECT" val="939*519"/>
-  <p:tag name="TABLE_ENDDRAG_RECT" val="0*-2*939*519"/>
+<p:tagLst xmlns:p="http://schemas.openxmlformats.org/presentationml/2006/main">
+  <p:tag name="KSO_WM_DIAGRAM_VIRTUALLY_FRAME" val="{&quot;height&quot;:295.45,&quot;left&quot;:193.97795275590542,&quot;top&quot;:124.7,&quot;width&quot;:304.8220472440945}"/>
 </p:tagLst>
 </file>
 
 <file path=ppt/tags/tag20.xml><?xml version="1.0" encoding="utf-8"?>
-<p:tagLst xmlns:a="http://schemas.openxmlformats.org/drawingml/2006/main" xmlns:r="http://schemas.openxmlformats.org/officeDocument/2006/relationships" xmlns:p="http://schemas.openxmlformats.org/presentationml/2006/main">
+<p:tagLst xmlns:p="http://schemas.openxmlformats.org/presentationml/2006/main">
   <p:tag name="KSO_WM_DIAGRAM_VIRTUALLY_FRAME" val="{&quot;height&quot;:295.45,&quot;left&quot;:193.97795275590542,&quot;top&quot;:124.7,&quot;width&quot;:304.8220472440945}"/>
 </p:tagLst>
 </file>
 
 <file path=ppt/tags/tag21.xml><?xml version="1.0" encoding="utf-8"?>
-<p:tagLst xmlns:a="http://schemas.openxmlformats.org/drawingml/2006/main" xmlns:r="http://schemas.openxmlformats.org/officeDocument/2006/relationships" xmlns:p="http://schemas.openxmlformats.org/presentationml/2006/main">
+<p:tagLst xmlns:p="http://schemas.openxmlformats.org/presentationml/2006/main">
   <p:tag name="KSO_WM_DIAGRAM_VIRTUALLY_FRAME" val="{&quot;height&quot;:295.45,&quot;left&quot;:193.97795275590542,&quot;top&quot;:124.7,&quot;width&quot;:304.8220472440945}"/>
 </p:tagLst>
 </file>
 
 <file path=ppt/tags/tag22.xml><?xml version="1.0" encoding="utf-8"?>
-<p:tagLst xmlns:a="http://schemas.openxmlformats.org/drawingml/2006/main" xmlns:r="http://schemas.openxmlformats.org/officeDocument/2006/relationships" xmlns:p="http://schemas.openxmlformats.org/presentationml/2006/main">
+<p:tagLst xmlns:p="http://schemas.openxmlformats.org/presentationml/2006/main">
   <p:tag name="KSO_WM_DIAGRAM_VIRTUALLY_FRAME" val="{&quot;height&quot;:295.45,&quot;left&quot;:193.97795275590542,&quot;top&quot;:124.7,&quot;width&quot;:304.8220472440945}"/>
 </p:tagLst>
 </file>
 
 <file path=ppt/tags/tag23.xml><?xml version="1.0" encoding="utf-8"?>
-<p:tagLst xmlns:a="http://schemas.openxmlformats.org/drawingml/2006/main" xmlns:r="http://schemas.openxmlformats.org/officeDocument/2006/relationships" xmlns:p="http://schemas.openxmlformats.org/presentationml/2006/main">
+<p:tagLst xmlns:p="http://schemas.openxmlformats.org/presentationml/2006/main">
   <p:tag name="KSO_WM_DIAGRAM_VIRTUALLY_FRAME" val="{&quot;height&quot;:295.45,&quot;left&quot;:193.97795275590542,&quot;top&quot;:124.7,&quot;width&quot;:304.8220472440945}"/>
 </p:tagLst>
 </file>
 
 <file path=ppt/tags/tag24.xml><?xml version="1.0" encoding="utf-8"?>
-<p:tagLst xmlns:a="http://schemas.openxmlformats.org/drawingml/2006/main" xmlns:r="http://schemas.openxmlformats.org/officeDocument/2006/relationships" xmlns:p="http://schemas.openxmlformats.org/presentationml/2006/main">
+<p:tagLst xmlns:p="http://schemas.openxmlformats.org/presentationml/2006/main">
   <p:tag name="KSO_WM_DIAGRAM_VIRTUALLY_FRAME" val="{&quot;height&quot;:295.45,&quot;left&quot;:193.97795275590542,&quot;top&quot;:124.7,&quot;width&quot;:304.8220472440945}"/>
 </p:tagLst>
 </file>
 
 <file path=ppt/tags/tag25.xml><?xml version="1.0" encoding="utf-8"?>
-<p:tagLst xmlns:a="http://schemas.openxmlformats.org/drawingml/2006/main" xmlns:r="http://schemas.openxmlformats.org/officeDocument/2006/relationships" xmlns:p="http://schemas.openxmlformats.org/presentationml/2006/main">
+<p:tagLst xmlns:p="http://schemas.openxmlformats.org/presentationml/2006/main">
   <p:tag name="KSO_WM_DIAGRAM_VIRTUALLY_FRAME" val="{&quot;height&quot;:295.45,&quot;left&quot;:193.97795275590542,&quot;top&quot;:124.7,&quot;width&quot;:304.8220472440945}"/>
 </p:tagLst>
 </file>
 
 <file path=ppt/tags/tag26.xml><?xml version="1.0" encoding="utf-8"?>
-<p:tagLst xmlns:a="http://schemas.openxmlformats.org/drawingml/2006/main" xmlns:r="http://schemas.openxmlformats.org/officeDocument/2006/relationships" xmlns:p="http://schemas.openxmlformats.org/presentationml/2006/main">
-  <p:tag name="KSO_WM_DIAGRAM_VIRTUALLY_FRAME" val="{&quot;height&quot;:295.45,&quot;left&quot;:193.97795275590542,&quot;top&quot;:124.7,&quot;width&quot;:304.8220472440945}"/>
+<p:tagLst xmlns:p="http://schemas.openxmlformats.org/presentationml/2006/main">
+  <p:tag name="RESOURCE_RECORD_KEY" val="{&quot;10&quot;:[20179637,20211662,50039266,21564682]}"/>
 </p:tagLst>
 </file>
 
 <file path=ppt/tags/tag3.xml><?xml version="1.0" encoding="utf-8"?>
-<p:tagLst xmlns:a="http://schemas.openxmlformats.org/drawingml/2006/main" xmlns:r="http://schemas.openxmlformats.org/officeDocument/2006/relationships" xmlns:p="http://schemas.openxmlformats.org/presentationml/2006/main">
+<p:tagLst xmlns:p="http://schemas.openxmlformats.org/presentationml/2006/main">
   <p:tag name="KSO_WM_DIAGRAM_VIRTUALLY_FRAME" val="{&quot;height&quot;:295.45,&quot;left&quot;:193.97795275590542,&quot;top&quot;:124.7,&quot;width&quot;:304.8220472440945}"/>
 </p:tagLst>
 </file>
 
 <file path=ppt/tags/tag4.xml><?xml version="1.0" encoding="utf-8"?>
-<p:tagLst xmlns:a="http://schemas.openxmlformats.org/drawingml/2006/main" xmlns:r="http://schemas.openxmlformats.org/officeDocument/2006/relationships" xmlns:p="http://schemas.openxmlformats.org/presentationml/2006/main">
+<p:tagLst xmlns:p="http://schemas.openxmlformats.org/presentationml/2006/main">
   <p:tag name="KSO_WM_DIAGRAM_VIRTUALLY_FRAME" val="{&quot;height&quot;:295.45,&quot;left&quot;:193.97795275590542,&quot;top&quot;:124.7,&quot;width&quot;:304.8220472440945}"/>
 </p:tagLst>
 </file>
 
 <file path=ppt/tags/tag5.xml><?xml version="1.0" encoding="utf-8"?>
-<p:tagLst xmlns:a="http://schemas.openxmlformats.org/drawingml/2006/main" xmlns:r="http://schemas.openxmlformats.org/officeDocument/2006/relationships" xmlns:p="http://schemas.openxmlformats.org/presentationml/2006/main">
+<p:tagLst xmlns:p="http://schemas.openxmlformats.org/presentationml/2006/main">
   <p:tag name="KSO_WM_DIAGRAM_VIRTUALLY_FRAME" val="{&quot;height&quot;:295.45,&quot;left&quot;:193.97795275590542,&quot;top&quot;:124.7,&quot;width&quot;:304.8220472440945}"/>
 </p:tagLst>
 </file>
 
 <file path=ppt/tags/tag6.xml><?xml version="1.0" encoding="utf-8"?>
-<p:tagLst xmlns:a="http://schemas.openxmlformats.org/drawingml/2006/main" xmlns:r="http://schemas.openxmlformats.org/officeDocument/2006/relationships" xmlns:p="http://schemas.openxmlformats.org/presentationml/2006/main">
+<p:tagLst xmlns:p="http://schemas.openxmlformats.org/presentationml/2006/main">
   <p:tag name="KSO_WM_DIAGRAM_VIRTUALLY_FRAME" val="{&quot;height&quot;:295.45,&quot;left&quot;:193.97795275590542,&quot;top&quot;:124.7,&quot;width&quot;:304.8220472440945}"/>
 </p:tagLst>
 </file>
 
 <file path=ppt/tags/tag7.xml><?xml version="1.0" encoding="utf-8"?>
-<p:tagLst xmlns:a="http://schemas.openxmlformats.org/drawingml/2006/main" xmlns:r="http://schemas.openxmlformats.org/officeDocument/2006/relationships" xmlns:p="http://schemas.openxmlformats.org/presentationml/2006/main">
+<p:tagLst xmlns:p="http://schemas.openxmlformats.org/presentationml/2006/main">
   <p:tag name="KSO_WM_DIAGRAM_VIRTUALLY_FRAME" val="{&quot;height&quot;:295.45,&quot;left&quot;:193.97795275590542,&quot;top&quot;:124.7,&quot;width&quot;:304.8220472440945}"/>
 </p:tagLst>
 </file>
 
 <file path=ppt/tags/tag8.xml><?xml version="1.0" encoding="utf-8"?>
-<p:tagLst xmlns:a="http://schemas.openxmlformats.org/drawingml/2006/main" xmlns:r="http://schemas.openxmlformats.org/officeDocument/2006/relationships" xmlns:p="http://schemas.openxmlformats.org/presentationml/2006/main">
+<p:tagLst xmlns:p="http://schemas.openxmlformats.org/presentationml/2006/main">
   <p:tag name="KSO_WM_DIAGRAM_VIRTUALLY_FRAME" val="{&quot;height&quot;:295.45,&quot;left&quot;:193.97795275590542,&quot;top&quot;:124.7,&quot;width&quot;:304.8220472440945}"/>
 </p:tagLst>
 </file>
 
 <file path=ppt/tags/tag9.xml><?xml version="1.0" encoding="utf-8"?>
-<p:tagLst xmlns:a="http://schemas.openxmlformats.org/drawingml/2006/main" xmlns:r="http://schemas.openxmlformats.org/officeDocument/2006/relationships" xmlns:p="http://schemas.openxmlformats.org/presentationml/2006/main">
+<p:tagLst xmlns:p="http://schemas.openxmlformats.org/presentationml/2006/main">
   <p:tag name="KSO_WM_DIAGRAM_VIRTUALLY_FRAME" val="{&quot;height&quot;:295.45,&quot;left&quot;:193.97795275590542,&quot;top&quot;:124.7,&quot;width&quot;:304.8220472440945}"/>
 </p:tagLst>
 </file>
@@ -10468,7 +11764,6 @@
       </a:style>
     </a:lnDef>
   </a:objectDefaults>
-  <a:extraClrSchemeLst/>
   <a:extLst>
     <a:ext uri="{05A4C25C-085E-4340-85A3-A5531E510DB2}">
       <thm15:themeFamily xmlns:thm15="http://schemas.microsoft.com/office/thememl/2012/main" name="Office Theme" id="{62F939B6-93AF-4DB8-9C6B-D6C7DFDC589F}" vid="{4A3C46E8-61CC-4603-A589-7422A47A8E4A}"/>
@@ -10728,8 +12023,6 @@
       </a:bgFillStyleLst>
     </a:fmtScheme>
   </a:themeElements>
-  <a:objectDefaults/>
-  <a:extraClrSchemeLst/>
   <a:extLst>
     <a:ext uri="{05A4C25C-085E-4340-85A3-A5531E510DB2}">
       <thm15:themeFamily xmlns:thm15="http://schemas.microsoft.com/office/thememl/2012/main" name="Office Theme" id="{62F939B6-93AF-4DB8-9C6B-D6C7DFDC589F}" vid="{4A3C46E8-61CC-4603-A589-7422A47A8E4A}"/>
